--- a/チーム案無し仕様書.pptx
+++ b/チーム案無し仕様書.pptx
@@ -123,1805 +123,6 @@
 </p:presentation>
 </file>
 
-<file path=ppt/changesInfos/changesInfo1.xml><?xml version="1.0" encoding="utf-8"?>
-<pc:chgInfo xmlns:a="http://schemas.openxmlformats.org/drawingml/2006/main" xmlns:r="http://schemas.openxmlformats.org/officeDocument/2006/relationships" xmlns:ac="http://schemas.microsoft.com/office/drawing/2013/main/command" xmlns:pc="http://schemas.microsoft.com/office/powerpoint/2013/main/command">
-  <pc:docChgLst>
-    <pc:chgData name="馬場　碧生" userId="242fe924-956f-4f80-97d5-7a3231fdf9ba" providerId="ADAL" clId="{E59E2DC9-86A0-43C6-AC92-2955BB4E7CDD}"/>
-    <pc:docChg chg="undo redo custSel addSld delSld modSld sldOrd">
-      <pc:chgData name="馬場　碧生" userId="242fe924-956f-4f80-97d5-7a3231fdf9ba" providerId="ADAL" clId="{E59E2DC9-86A0-43C6-AC92-2955BB4E7CDD}" dt="2026-02-09T00:50:51.414" v="2361" actId="207"/>
-      <pc:docMkLst>
-        <pc:docMk/>
-      </pc:docMkLst>
-      <pc:sldChg chg="delSp modSp mod">
-        <pc:chgData name="馬場　碧生" userId="242fe924-956f-4f80-97d5-7a3231fdf9ba" providerId="ADAL" clId="{E59E2DC9-86A0-43C6-AC92-2955BB4E7CDD}" dt="2026-02-05T02:15:26.639" v="62" actId="14100"/>
-        <pc:sldMkLst>
-          <pc:docMk/>
-          <pc:sldMk cId="677173856" sldId="257"/>
-        </pc:sldMkLst>
-        <pc:spChg chg="del mod">
-          <ac:chgData name="馬場　碧生" userId="242fe924-956f-4f80-97d5-7a3231fdf9ba" providerId="ADAL" clId="{E59E2DC9-86A0-43C6-AC92-2955BB4E7CDD}" dt="2026-02-05T02:15:19.655" v="60"/>
-          <ac:spMkLst>
-            <pc:docMk/>
-            <pc:sldMk cId="677173856" sldId="257"/>
-            <ac:spMk id="4" creationId="{C51034D1-8157-4584-A313-E78EBD7184DA}"/>
-          </ac:spMkLst>
-        </pc:spChg>
-        <pc:graphicFrameChg chg="mod modGraphic">
-          <ac:chgData name="馬場　碧生" userId="242fe924-956f-4f80-97d5-7a3231fdf9ba" providerId="ADAL" clId="{E59E2DC9-86A0-43C6-AC92-2955BB4E7CDD}" dt="2026-02-05T02:15:26.639" v="62" actId="14100"/>
-          <ac:graphicFrameMkLst>
-            <pc:docMk/>
-            <pc:sldMk cId="677173856" sldId="257"/>
-            <ac:graphicFrameMk id="6" creationId="{6E09C39A-D011-4DC0-877A-8E49B28B4529}"/>
-          </ac:graphicFrameMkLst>
-        </pc:graphicFrameChg>
-      </pc:sldChg>
-      <pc:sldChg chg="modSp mod ord">
-        <pc:chgData name="馬場　碧生" userId="242fe924-956f-4f80-97d5-7a3231fdf9ba" providerId="ADAL" clId="{E59E2DC9-86A0-43C6-AC92-2955BB4E7CDD}" dt="2026-02-05T02:26:00.198" v="220" actId="20577"/>
-        <pc:sldMkLst>
-          <pc:docMk/>
-          <pc:sldMk cId="1371136722" sldId="259"/>
-        </pc:sldMkLst>
-        <pc:spChg chg="mod">
-          <ac:chgData name="馬場　碧生" userId="242fe924-956f-4f80-97d5-7a3231fdf9ba" providerId="ADAL" clId="{E59E2DC9-86A0-43C6-AC92-2955BB4E7CDD}" dt="2026-02-05T02:26:00.198" v="220" actId="20577"/>
-          <ac:spMkLst>
-            <pc:docMk/>
-            <pc:sldMk cId="1371136722" sldId="259"/>
-            <ac:spMk id="2" creationId="{BA6D6F7A-225F-4306-B7D8-49BBB65525CD}"/>
-          </ac:spMkLst>
-        </pc:spChg>
-      </pc:sldChg>
-      <pc:sldChg chg="addSp delSp modSp mod">
-        <pc:chgData name="馬場　碧生" userId="242fe924-956f-4f80-97d5-7a3231fdf9ba" providerId="ADAL" clId="{E59E2DC9-86A0-43C6-AC92-2955BB4E7CDD}" dt="2026-02-06T01:25:05.359" v="1383" actId="1076"/>
-        <pc:sldMkLst>
-          <pc:docMk/>
-          <pc:sldMk cId="2993221000" sldId="260"/>
-        </pc:sldMkLst>
-        <pc:spChg chg="mod">
-          <ac:chgData name="馬場　碧生" userId="242fe924-956f-4f80-97d5-7a3231fdf9ba" providerId="ADAL" clId="{E59E2DC9-86A0-43C6-AC92-2955BB4E7CDD}" dt="2026-02-06T00:41:49.857" v="727"/>
-          <ac:spMkLst>
-            <pc:docMk/>
-            <pc:sldMk cId="2993221000" sldId="260"/>
-            <ac:spMk id="2" creationId="{D425C189-9918-4F01-BBE5-8444CE9D89CD}"/>
-          </ac:spMkLst>
-        </pc:spChg>
-        <pc:spChg chg="mod">
-          <ac:chgData name="馬場　碧生" userId="242fe924-956f-4f80-97d5-7a3231fdf9ba" providerId="ADAL" clId="{E59E2DC9-86A0-43C6-AC92-2955BB4E7CDD}" dt="2026-02-06T01:25:05.359" v="1383" actId="1076"/>
-          <ac:spMkLst>
-            <pc:docMk/>
-            <pc:sldMk cId="2993221000" sldId="260"/>
-            <ac:spMk id="5" creationId="{109AC8FD-4CFE-4322-A842-C45D07F43B9E}"/>
-          </ac:spMkLst>
-        </pc:spChg>
-        <pc:spChg chg="del mod">
-          <ac:chgData name="馬場　碧生" userId="242fe924-956f-4f80-97d5-7a3231fdf9ba" providerId="ADAL" clId="{E59E2DC9-86A0-43C6-AC92-2955BB4E7CDD}" dt="2026-02-06T00:50:22.860" v="828"/>
-          <ac:spMkLst>
-            <pc:docMk/>
-            <pc:sldMk cId="2993221000" sldId="260"/>
-            <ac:spMk id="7" creationId="{F5E377E2-A4F6-44BF-838B-D7FBFA658472}"/>
-          </ac:spMkLst>
-        </pc:spChg>
-        <pc:spChg chg="del mod">
-          <ac:chgData name="馬場　碧生" userId="242fe924-956f-4f80-97d5-7a3231fdf9ba" providerId="ADAL" clId="{E59E2DC9-86A0-43C6-AC92-2955BB4E7CDD}" dt="2026-02-06T00:51:59.658" v="856" actId="478"/>
-          <ac:spMkLst>
-            <pc:docMk/>
-            <pc:sldMk cId="2993221000" sldId="260"/>
-            <ac:spMk id="8" creationId="{A5CF21FC-F375-4062-9091-E56808E2553F}"/>
-          </ac:spMkLst>
-        </pc:spChg>
-        <pc:spChg chg="add del mod">
-          <ac:chgData name="馬場　碧生" userId="242fe924-956f-4f80-97d5-7a3231fdf9ba" providerId="ADAL" clId="{E59E2DC9-86A0-43C6-AC92-2955BB4E7CDD}" dt="2026-02-06T00:42:07.998" v="737" actId="22"/>
-          <ac:spMkLst>
-            <pc:docMk/>
-            <pc:sldMk cId="2993221000" sldId="260"/>
-            <ac:spMk id="9" creationId="{FFC5555E-B7CA-4D44-AE7F-076C45BBF77C}"/>
-          </ac:spMkLst>
-        </pc:spChg>
-        <pc:spChg chg="add mod">
-          <ac:chgData name="馬場　碧生" userId="242fe924-956f-4f80-97d5-7a3231fdf9ba" providerId="ADAL" clId="{E59E2DC9-86A0-43C6-AC92-2955BB4E7CDD}" dt="2026-02-06T01:25:00.867" v="1382" actId="1076"/>
-          <ac:spMkLst>
-            <pc:docMk/>
-            <pc:sldMk cId="2993221000" sldId="260"/>
-            <ac:spMk id="10" creationId="{F0F07218-5D64-47CB-A37F-A4B1DA3AFC44}"/>
-          </ac:spMkLst>
-        </pc:spChg>
-        <pc:spChg chg="add mod">
-          <ac:chgData name="馬場　碧生" userId="242fe924-956f-4f80-97d5-7a3231fdf9ba" providerId="ADAL" clId="{E59E2DC9-86A0-43C6-AC92-2955BB4E7CDD}" dt="2026-02-06T01:25:00.867" v="1382" actId="1076"/>
-          <ac:spMkLst>
-            <pc:docMk/>
-            <pc:sldMk cId="2993221000" sldId="260"/>
-            <ac:spMk id="12" creationId="{20078DF2-6A9A-42FD-A264-CDFCB5708D17}"/>
-          </ac:spMkLst>
-        </pc:spChg>
-        <pc:spChg chg="add mod">
-          <ac:chgData name="馬場　碧生" userId="242fe924-956f-4f80-97d5-7a3231fdf9ba" providerId="ADAL" clId="{E59E2DC9-86A0-43C6-AC92-2955BB4E7CDD}" dt="2026-02-06T01:25:00.867" v="1382" actId="1076"/>
-          <ac:spMkLst>
-            <pc:docMk/>
-            <pc:sldMk cId="2993221000" sldId="260"/>
-            <ac:spMk id="13" creationId="{DD1A584C-9DCA-4D5D-A034-DCF1E5DA904D}"/>
-          </ac:spMkLst>
-        </pc:spChg>
-        <pc:spChg chg="add mod">
-          <ac:chgData name="馬場　碧生" userId="242fe924-956f-4f80-97d5-7a3231fdf9ba" providerId="ADAL" clId="{E59E2DC9-86A0-43C6-AC92-2955BB4E7CDD}" dt="2026-02-06T01:25:00.867" v="1382" actId="1076"/>
-          <ac:spMkLst>
-            <pc:docMk/>
-            <pc:sldMk cId="2993221000" sldId="260"/>
-            <ac:spMk id="14" creationId="{A8F6C23B-17EF-4009-9ED8-DF49730ED00B}"/>
-          </ac:spMkLst>
-        </pc:spChg>
-        <pc:spChg chg="add del mod">
-          <ac:chgData name="馬場　碧生" userId="242fe924-956f-4f80-97d5-7a3231fdf9ba" providerId="ADAL" clId="{E59E2DC9-86A0-43C6-AC92-2955BB4E7CDD}" dt="2026-02-06T01:24:54.558" v="1381" actId="478"/>
-          <ac:spMkLst>
-            <pc:docMk/>
-            <pc:sldMk cId="2993221000" sldId="260"/>
-            <ac:spMk id="16" creationId="{3F97B3BF-B116-4740-82DA-383F640F43B4}"/>
-          </ac:spMkLst>
-        </pc:spChg>
-        <pc:spChg chg="add del mod">
-          <ac:chgData name="馬場　碧生" userId="242fe924-956f-4f80-97d5-7a3231fdf9ba" providerId="ADAL" clId="{E59E2DC9-86A0-43C6-AC92-2955BB4E7CDD}" dt="2026-02-06T01:23:31.961" v="1360"/>
-          <ac:spMkLst>
-            <pc:docMk/>
-            <pc:sldMk cId="2993221000" sldId="260"/>
-            <ac:spMk id="42" creationId="{EE9EFE0F-4304-478B-9040-A4920652E73B}"/>
-          </ac:spMkLst>
-        </pc:spChg>
-        <pc:spChg chg="add del mod">
-          <ac:chgData name="馬場　碧生" userId="242fe924-956f-4f80-97d5-7a3231fdf9ba" providerId="ADAL" clId="{E59E2DC9-86A0-43C6-AC92-2955BB4E7CDD}" dt="2026-02-06T00:58:52.727" v="920" actId="478"/>
-          <ac:spMkLst>
-            <pc:docMk/>
-            <pc:sldMk cId="2993221000" sldId="260"/>
-            <ac:spMk id="43" creationId="{28DA591B-D7DB-4760-8BBC-A687E483CF7B}"/>
-          </ac:spMkLst>
-        </pc:spChg>
-        <pc:spChg chg="add del mod">
-          <ac:chgData name="馬場　碧生" userId="242fe924-956f-4f80-97d5-7a3231fdf9ba" providerId="ADAL" clId="{E59E2DC9-86A0-43C6-AC92-2955BB4E7CDD}" dt="2026-02-06T00:58:51.966" v="919" actId="478"/>
-          <ac:spMkLst>
-            <pc:docMk/>
-            <pc:sldMk cId="2993221000" sldId="260"/>
-            <ac:spMk id="44" creationId="{5AB49844-0FCE-48D0-AF76-F781877A4D0B}"/>
-          </ac:spMkLst>
-        </pc:spChg>
-        <pc:spChg chg="add del mod">
-          <ac:chgData name="馬場　碧生" userId="242fe924-956f-4f80-97d5-7a3231fdf9ba" providerId="ADAL" clId="{E59E2DC9-86A0-43C6-AC92-2955BB4E7CDD}" dt="2026-02-06T01:03:45.717" v="985"/>
-          <ac:spMkLst>
-            <pc:docMk/>
-            <pc:sldMk cId="2993221000" sldId="260"/>
-            <ac:spMk id="46" creationId="{984483A2-97FC-42A6-AE81-88C170C64F43}"/>
-          </ac:spMkLst>
-        </pc:spChg>
-        <pc:spChg chg="add del mod">
-          <ac:chgData name="馬場　碧生" userId="242fe924-956f-4f80-97d5-7a3231fdf9ba" providerId="ADAL" clId="{E59E2DC9-86A0-43C6-AC92-2955BB4E7CDD}" dt="2026-02-06T01:23:31.962" v="1362"/>
-          <ac:spMkLst>
-            <pc:docMk/>
-            <pc:sldMk cId="2993221000" sldId="260"/>
-            <ac:spMk id="48" creationId="{A98C21F9-BC83-4721-B751-28539AF32CAB}"/>
-          </ac:spMkLst>
-        </pc:spChg>
-        <pc:spChg chg="add del mod">
-          <ac:chgData name="馬場　碧生" userId="242fe924-956f-4f80-97d5-7a3231fdf9ba" providerId="ADAL" clId="{E59E2DC9-86A0-43C6-AC92-2955BB4E7CDD}" dt="2026-02-06T01:04:32.714" v="1000" actId="22"/>
-          <ac:spMkLst>
-            <pc:docMk/>
-            <pc:sldMk cId="2993221000" sldId="260"/>
-            <ac:spMk id="55" creationId="{9BE5532C-0E84-44FD-AEE8-7F66591CAB53}"/>
-          </ac:spMkLst>
-        </pc:spChg>
-        <pc:spChg chg="add del mod ord">
-          <ac:chgData name="馬場　碧生" userId="242fe924-956f-4f80-97d5-7a3231fdf9ba" providerId="ADAL" clId="{E59E2DC9-86A0-43C6-AC92-2955BB4E7CDD}" dt="2026-02-06T01:22:25.070" v="1347" actId="478"/>
-          <ac:spMkLst>
-            <pc:docMk/>
-            <pc:sldMk cId="2993221000" sldId="260"/>
-            <ac:spMk id="79" creationId="{F6E2951C-6BA8-40F2-9F53-E3A8F81E8777}"/>
-          </ac:spMkLst>
-        </pc:spChg>
-        <pc:cxnChg chg="add del mod">
-          <ac:chgData name="馬場　碧生" userId="242fe924-956f-4f80-97d5-7a3231fdf9ba" providerId="ADAL" clId="{E59E2DC9-86A0-43C6-AC92-2955BB4E7CDD}" dt="2026-02-06T01:24:49.484" v="1379" actId="478"/>
-          <ac:cxnSpMkLst>
-            <pc:docMk/>
-            <pc:sldMk cId="2993221000" sldId="260"/>
-            <ac:cxnSpMk id="18" creationId="{BF200571-0C50-459C-B18E-41A45263A2F5}"/>
-          </ac:cxnSpMkLst>
-        </pc:cxnChg>
-        <pc:cxnChg chg="add del mod">
-          <ac:chgData name="馬場　碧生" userId="242fe924-956f-4f80-97d5-7a3231fdf9ba" providerId="ADAL" clId="{E59E2DC9-86A0-43C6-AC92-2955BB4E7CDD}" dt="2026-02-06T01:24:49.484" v="1379" actId="478"/>
-          <ac:cxnSpMkLst>
-            <pc:docMk/>
-            <pc:sldMk cId="2993221000" sldId="260"/>
-            <ac:cxnSpMk id="22" creationId="{FAFB6A59-CA5A-4989-9A6A-B1CEB39A350F}"/>
-          </ac:cxnSpMkLst>
-        </pc:cxnChg>
-        <pc:cxnChg chg="add del mod">
-          <ac:chgData name="馬場　碧生" userId="242fe924-956f-4f80-97d5-7a3231fdf9ba" providerId="ADAL" clId="{E59E2DC9-86A0-43C6-AC92-2955BB4E7CDD}" dt="2026-02-06T01:24:49.484" v="1379" actId="478"/>
-          <ac:cxnSpMkLst>
-            <pc:docMk/>
-            <pc:sldMk cId="2993221000" sldId="260"/>
-            <ac:cxnSpMk id="24" creationId="{87CEDABA-B7AD-4122-AD39-EA8B31E41656}"/>
-          </ac:cxnSpMkLst>
-        </pc:cxnChg>
-        <pc:cxnChg chg="add del mod">
-          <ac:chgData name="馬場　碧生" userId="242fe924-956f-4f80-97d5-7a3231fdf9ba" providerId="ADAL" clId="{E59E2DC9-86A0-43C6-AC92-2955BB4E7CDD}" dt="2026-02-06T01:24:49.484" v="1379" actId="478"/>
-          <ac:cxnSpMkLst>
-            <pc:docMk/>
-            <pc:sldMk cId="2993221000" sldId="260"/>
-            <ac:cxnSpMk id="26" creationId="{3D06AF2A-A6C7-4287-873A-EBEB5C18AC97}"/>
-          </ac:cxnSpMkLst>
-        </pc:cxnChg>
-        <pc:cxnChg chg="add del mod">
-          <ac:chgData name="馬場　碧生" userId="242fe924-956f-4f80-97d5-7a3231fdf9ba" providerId="ADAL" clId="{E59E2DC9-86A0-43C6-AC92-2955BB4E7CDD}" dt="2026-02-06T01:24:49.484" v="1379" actId="478"/>
-          <ac:cxnSpMkLst>
-            <pc:docMk/>
-            <pc:sldMk cId="2993221000" sldId="260"/>
-            <ac:cxnSpMk id="29" creationId="{77E21384-4470-43AB-AC71-6A300137DF88}"/>
-          </ac:cxnSpMkLst>
-        </pc:cxnChg>
-        <pc:cxnChg chg="add del mod">
-          <ac:chgData name="馬場　碧生" userId="242fe924-956f-4f80-97d5-7a3231fdf9ba" providerId="ADAL" clId="{E59E2DC9-86A0-43C6-AC92-2955BB4E7CDD}" dt="2026-02-06T01:11:19.317" v="1160" actId="478"/>
-          <ac:cxnSpMkLst>
-            <pc:docMk/>
-            <pc:sldMk cId="2993221000" sldId="260"/>
-            <ac:cxnSpMk id="50" creationId="{D081DCBD-451B-4DC3-9BFE-CE1CD22BF54B}"/>
-          </ac:cxnSpMkLst>
-        </pc:cxnChg>
-        <pc:cxnChg chg="add del mod">
-          <ac:chgData name="馬場　碧生" userId="242fe924-956f-4f80-97d5-7a3231fdf9ba" providerId="ADAL" clId="{E59E2DC9-86A0-43C6-AC92-2955BB4E7CDD}" dt="2026-02-06T01:05:30.704" v="1028" actId="478"/>
-          <ac:cxnSpMkLst>
-            <pc:docMk/>
-            <pc:sldMk cId="2993221000" sldId="260"/>
-            <ac:cxnSpMk id="56" creationId="{B58786FC-8136-4A07-8610-71ACDB006072}"/>
-          </ac:cxnSpMkLst>
-        </pc:cxnChg>
-        <pc:cxnChg chg="add del mod">
-          <ac:chgData name="馬場　碧生" userId="242fe924-956f-4f80-97d5-7a3231fdf9ba" providerId="ADAL" clId="{E59E2DC9-86A0-43C6-AC92-2955BB4E7CDD}" dt="2026-02-06T01:05:30.704" v="1028" actId="478"/>
-          <ac:cxnSpMkLst>
-            <pc:docMk/>
-            <pc:sldMk cId="2993221000" sldId="260"/>
-            <ac:cxnSpMk id="57" creationId="{EF164C2A-DC08-482E-A8F0-40EB175573A6}"/>
-          </ac:cxnSpMkLst>
-        </pc:cxnChg>
-        <pc:cxnChg chg="add del mod">
-          <ac:chgData name="馬場　碧生" userId="242fe924-956f-4f80-97d5-7a3231fdf9ba" providerId="ADAL" clId="{E59E2DC9-86A0-43C6-AC92-2955BB4E7CDD}" dt="2026-02-06T01:05:30.704" v="1028" actId="478"/>
-          <ac:cxnSpMkLst>
-            <pc:docMk/>
-            <pc:sldMk cId="2993221000" sldId="260"/>
-            <ac:cxnSpMk id="58" creationId="{F0F84ADE-E1A4-4084-A4B9-E05C8080E747}"/>
-          </ac:cxnSpMkLst>
-        </pc:cxnChg>
-        <pc:cxnChg chg="add del mod">
-          <ac:chgData name="馬場　碧生" userId="242fe924-956f-4f80-97d5-7a3231fdf9ba" providerId="ADAL" clId="{E59E2DC9-86A0-43C6-AC92-2955BB4E7CDD}" dt="2026-02-06T01:05:30.704" v="1028" actId="478"/>
-          <ac:cxnSpMkLst>
-            <pc:docMk/>
-            <pc:sldMk cId="2993221000" sldId="260"/>
-            <ac:cxnSpMk id="59" creationId="{0E2D542F-F36E-4202-A93D-DB0F42EDF973}"/>
-          </ac:cxnSpMkLst>
-        </pc:cxnChg>
-        <pc:cxnChg chg="add del mod">
-          <ac:chgData name="馬場　碧生" userId="242fe924-956f-4f80-97d5-7a3231fdf9ba" providerId="ADAL" clId="{E59E2DC9-86A0-43C6-AC92-2955BB4E7CDD}" dt="2026-02-06T01:05:30.704" v="1028" actId="478"/>
-          <ac:cxnSpMkLst>
-            <pc:docMk/>
-            <pc:sldMk cId="2993221000" sldId="260"/>
-            <ac:cxnSpMk id="60" creationId="{AA2076B8-49ED-40ED-8A9C-E854DF7CBA83}"/>
-          </ac:cxnSpMkLst>
-        </pc:cxnChg>
-        <pc:cxnChg chg="add del mod">
-          <ac:chgData name="馬場　碧生" userId="242fe924-956f-4f80-97d5-7a3231fdf9ba" providerId="ADAL" clId="{E59E2DC9-86A0-43C6-AC92-2955BB4E7CDD}" dt="2026-02-06T01:05:30.704" v="1028" actId="478"/>
-          <ac:cxnSpMkLst>
-            <pc:docMk/>
-            <pc:sldMk cId="2993221000" sldId="260"/>
-            <ac:cxnSpMk id="61" creationId="{7A78939D-5B34-4793-9F82-E910B917F90F}"/>
-          </ac:cxnSpMkLst>
-        </pc:cxnChg>
-        <pc:cxnChg chg="add del mod">
-          <ac:chgData name="馬場　碧生" userId="242fe924-956f-4f80-97d5-7a3231fdf9ba" providerId="ADAL" clId="{E59E2DC9-86A0-43C6-AC92-2955BB4E7CDD}" dt="2026-02-06T01:05:30.704" v="1028" actId="478"/>
-          <ac:cxnSpMkLst>
-            <pc:docMk/>
-            <pc:sldMk cId="2993221000" sldId="260"/>
-            <ac:cxnSpMk id="62" creationId="{BA990E16-4090-4FB5-86F6-DF2093E688E1}"/>
-          </ac:cxnSpMkLst>
-        </pc:cxnChg>
-        <pc:cxnChg chg="add del mod">
-          <ac:chgData name="馬場　碧生" userId="242fe924-956f-4f80-97d5-7a3231fdf9ba" providerId="ADAL" clId="{E59E2DC9-86A0-43C6-AC92-2955BB4E7CDD}" dt="2026-02-06T01:05:30.704" v="1028" actId="478"/>
-          <ac:cxnSpMkLst>
-            <pc:docMk/>
-            <pc:sldMk cId="2993221000" sldId="260"/>
-            <ac:cxnSpMk id="63" creationId="{543A2D37-9AD9-4102-9E5B-75A453BFC2B7}"/>
-          </ac:cxnSpMkLst>
-        </pc:cxnChg>
-        <pc:cxnChg chg="add del mod">
-          <ac:chgData name="馬場　碧生" userId="242fe924-956f-4f80-97d5-7a3231fdf9ba" providerId="ADAL" clId="{E59E2DC9-86A0-43C6-AC92-2955BB4E7CDD}" dt="2026-02-06T01:05:30.704" v="1028" actId="478"/>
-          <ac:cxnSpMkLst>
-            <pc:docMk/>
-            <pc:sldMk cId="2993221000" sldId="260"/>
-            <ac:cxnSpMk id="64" creationId="{DC04E56E-7923-46A0-AAAA-7A7CE78697CE}"/>
-          </ac:cxnSpMkLst>
-        </pc:cxnChg>
-        <pc:cxnChg chg="add del mod">
-          <ac:chgData name="馬場　碧生" userId="242fe924-956f-4f80-97d5-7a3231fdf9ba" providerId="ADAL" clId="{E59E2DC9-86A0-43C6-AC92-2955BB4E7CDD}" dt="2026-02-06T01:05:32.368" v="1029" actId="478"/>
-          <ac:cxnSpMkLst>
-            <pc:docMk/>
-            <pc:sldMk cId="2993221000" sldId="260"/>
-            <ac:cxnSpMk id="65" creationId="{E1C9BB73-B1A9-471B-8050-1E6EF1D589CB}"/>
-          </ac:cxnSpMkLst>
-        </pc:cxnChg>
-        <pc:cxnChg chg="add del mod">
-          <ac:chgData name="馬場　碧生" userId="242fe924-956f-4f80-97d5-7a3231fdf9ba" providerId="ADAL" clId="{E59E2DC9-86A0-43C6-AC92-2955BB4E7CDD}" dt="2026-02-06T01:11:15.296" v="1155" actId="478"/>
-          <ac:cxnSpMkLst>
-            <pc:docMk/>
-            <pc:sldMk cId="2993221000" sldId="260"/>
-            <ac:cxnSpMk id="67" creationId="{B7DC78B8-EFAF-45BF-8E81-AA18FCCD8B8E}"/>
-          </ac:cxnSpMkLst>
-        </pc:cxnChg>
-        <pc:cxnChg chg="add del mod">
-          <ac:chgData name="馬場　碧生" userId="242fe924-956f-4f80-97d5-7a3231fdf9ba" providerId="ADAL" clId="{E59E2DC9-86A0-43C6-AC92-2955BB4E7CDD}" dt="2026-02-06T01:11:16.875" v="1157" actId="478"/>
-          <ac:cxnSpMkLst>
-            <pc:docMk/>
-            <pc:sldMk cId="2993221000" sldId="260"/>
-            <ac:cxnSpMk id="68" creationId="{86F3AADC-CBFD-460D-AD4A-447D5A6877A4}"/>
-          </ac:cxnSpMkLst>
-        </pc:cxnChg>
-        <pc:cxnChg chg="add del mod">
-          <ac:chgData name="馬場　碧生" userId="242fe924-956f-4f80-97d5-7a3231fdf9ba" providerId="ADAL" clId="{E59E2DC9-86A0-43C6-AC92-2955BB4E7CDD}" dt="2026-02-06T01:11:17.477" v="1158" actId="478"/>
-          <ac:cxnSpMkLst>
-            <pc:docMk/>
-            <pc:sldMk cId="2993221000" sldId="260"/>
-            <ac:cxnSpMk id="69" creationId="{81EB4199-6082-4900-AD75-3463B870487D}"/>
-          </ac:cxnSpMkLst>
-        </pc:cxnChg>
-        <pc:cxnChg chg="add del mod">
-          <ac:chgData name="馬場　碧生" userId="242fe924-956f-4f80-97d5-7a3231fdf9ba" providerId="ADAL" clId="{E59E2DC9-86A0-43C6-AC92-2955BB4E7CDD}" dt="2026-02-06T01:11:13.791" v="1153" actId="478"/>
-          <ac:cxnSpMkLst>
-            <pc:docMk/>
-            <pc:sldMk cId="2993221000" sldId="260"/>
-            <ac:cxnSpMk id="70" creationId="{BD65E8A5-02D5-438C-B7DD-ECDD90D5262B}"/>
-          </ac:cxnSpMkLst>
-        </pc:cxnChg>
-        <pc:cxnChg chg="add del mod">
-          <ac:chgData name="馬場　碧生" userId="242fe924-956f-4f80-97d5-7a3231fdf9ba" providerId="ADAL" clId="{E59E2DC9-86A0-43C6-AC92-2955BB4E7CDD}" dt="2026-02-06T01:11:19.957" v="1161" actId="478"/>
-          <ac:cxnSpMkLst>
-            <pc:docMk/>
-            <pc:sldMk cId="2993221000" sldId="260"/>
-            <ac:cxnSpMk id="71" creationId="{251B3936-3FD1-49C9-A6AE-390A2C99CE01}"/>
-          </ac:cxnSpMkLst>
-        </pc:cxnChg>
-        <pc:cxnChg chg="add del mod">
-          <ac:chgData name="馬場　碧生" userId="242fe924-956f-4f80-97d5-7a3231fdf9ba" providerId="ADAL" clId="{E59E2DC9-86A0-43C6-AC92-2955BB4E7CDD}" dt="2026-02-06T01:11:12.223" v="1151" actId="478"/>
-          <ac:cxnSpMkLst>
-            <pc:docMk/>
-            <pc:sldMk cId="2993221000" sldId="260"/>
-            <ac:cxnSpMk id="72" creationId="{8F9078DF-0B70-47E0-ABE9-398831DEA3F6}"/>
-          </ac:cxnSpMkLst>
-        </pc:cxnChg>
-        <pc:cxnChg chg="add del mod">
-          <ac:chgData name="馬場　碧生" userId="242fe924-956f-4f80-97d5-7a3231fdf9ba" providerId="ADAL" clId="{E59E2DC9-86A0-43C6-AC92-2955BB4E7CDD}" dt="2026-02-06T01:11:29.810" v="1167" actId="478"/>
-          <ac:cxnSpMkLst>
-            <pc:docMk/>
-            <pc:sldMk cId="2993221000" sldId="260"/>
-            <ac:cxnSpMk id="73" creationId="{6C524B36-80A8-4FFB-9B5C-C6E25052BE59}"/>
-          </ac:cxnSpMkLst>
-        </pc:cxnChg>
-        <pc:cxnChg chg="add del mod">
-          <ac:chgData name="馬場　碧生" userId="242fe924-956f-4f80-97d5-7a3231fdf9ba" providerId="ADAL" clId="{E59E2DC9-86A0-43C6-AC92-2955BB4E7CDD}" dt="2026-02-06T01:11:18.350" v="1159" actId="478"/>
-          <ac:cxnSpMkLst>
-            <pc:docMk/>
-            <pc:sldMk cId="2993221000" sldId="260"/>
-            <ac:cxnSpMk id="74" creationId="{03CE0F46-FB95-4FAD-800F-1DDC3F13BA2F}"/>
-          </ac:cxnSpMkLst>
-        </pc:cxnChg>
-        <pc:cxnChg chg="add del mod">
-          <ac:chgData name="馬場　碧生" userId="242fe924-956f-4f80-97d5-7a3231fdf9ba" providerId="ADAL" clId="{E59E2DC9-86A0-43C6-AC92-2955BB4E7CDD}" dt="2026-02-06T01:11:16.284" v="1156" actId="478"/>
-          <ac:cxnSpMkLst>
-            <pc:docMk/>
-            <pc:sldMk cId="2993221000" sldId="260"/>
-            <ac:cxnSpMk id="75" creationId="{26D7EE39-28F8-4D05-B530-61EC967BD81C}"/>
-          </ac:cxnSpMkLst>
-        </pc:cxnChg>
-        <pc:cxnChg chg="add del mod">
-          <ac:chgData name="馬場　碧生" userId="242fe924-956f-4f80-97d5-7a3231fdf9ba" providerId="ADAL" clId="{E59E2DC9-86A0-43C6-AC92-2955BB4E7CDD}" dt="2026-02-06T01:11:14.329" v="1154" actId="478"/>
-          <ac:cxnSpMkLst>
-            <pc:docMk/>
-            <pc:sldMk cId="2993221000" sldId="260"/>
-            <ac:cxnSpMk id="76" creationId="{D5CD4BB4-474C-496E-A7F8-6E0922B05CBA}"/>
-          </ac:cxnSpMkLst>
-        </pc:cxnChg>
-        <pc:cxnChg chg="add del mod">
-          <ac:chgData name="馬場　碧生" userId="242fe924-956f-4f80-97d5-7a3231fdf9ba" providerId="ADAL" clId="{E59E2DC9-86A0-43C6-AC92-2955BB4E7CDD}" dt="2026-02-06T01:11:20.752" v="1162" actId="478"/>
-          <ac:cxnSpMkLst>
-            <pc:docMk/>
-            <pc:sldMk cId="2993221000" sldId="260"/>
-            <ac:cxnSpMk id="77" creationId="{30BB1D98-4A26-416C-BAD9-589AA83A01F3}"/>
-          </ac:cxnSpMkLst>
-        </pc:cxnChg>
-        <pc:cxnChg chg="add del mod">
-          <ac:chgData name="馬場　碧生" userId="242fe924-956f-4f80-97d5-7a3231fdf9ba" providerId="ADAL" clId="{E59E2DC9-86A0-43C6-AC92-2955BB4E7CDD}" dt="2026-02-06T01:11:13.022" v="1152" actId="478"/>
-          <ac:cxnSpMkLst>
-            <pc:docMk/>
-            <pc:sldMk cId="2993221000" sldId="260"/>
-            <ac:cxnSpMk id="78" creationId="{CC73E07A-CB5C-4784-97BC-75B2ADC1FADD}"/>
-          </ac:cxnSpMkLst>
-        </pc:cxnChg>
-        <pc:cxnChg chg="add del mod">
-          <ac:chgData name="馬場　碧生" userId="242fe924-956f-4f80-97d5-7a3231fdf9ba" providerId="ADAL" clId="{E59E2DC9-86A0-43C6-AC92-2955BB4E7CDD}" dt="2026-02-06T01:11:33.681" v="1174" actId="478"/>
-          <ac:cxnSpMkLst>
-            <pc:docMk/>
-            <pc:sldMk cId="2993221000" sldId="260"/>
-            <ac:cxnSpMk id="80" creationId="{5D486727-0A48-496F-B400-7B3409C40923}"/>
-          </ac:cxnSpMkLst>
-        </pc:cxnChg>
-        <pc:cxnChg chg="add del mod">
-          <ac:chgData name="馬場　碧生" userId="242fe924-956f-4f80-97d5-7a3231fdf9ba" providerId="ADAL" clId="{E59E2DC9-86A0-43C6-AC92-2955BB4E7CDD}" dt="2026-02-06T01:11:31.872" v="1170" actId="478"/>
-          <ac:cxnSpMkLst>
-            <pc:docMk/>
-            <pc:sldMk cId="2993221000" sldId="260"/>
-            <ac:cxnSpMk id="81" creationId="{512C00FF-31EC-43DF-9CBC-06FD3B7BD5E0}"/>
-          </ac:cxnSpMkLst>
-        </pc:cxnChg>
-        <pc:cxnChg chg="add del mod">
-          <ac:chgData name="馬場　碧生" userId="242fe924-956f-4f80-97d5-7a3231fdf9ba" providerId="ADAL" clId="{E59E2DC9-86A0-43C6-AC92-2955BB4E7CDD}" dt="2026-02-06T01:11:32.361" v="1171" actId="478"/>
-          <ac:cxnSpMkLst>
-            <pc:docMk/>
-            <pc:sldMk cId="2993221000" sldId="260"/>
-            <ac:cxnSpMk id="82" creationId="{CE14FCCA-F351-48B2-AF4E-622A62A303B4}"/>
-          </ac:cxnSpMkLst>
-        </pc:cxnChg>
-        <pc:cxnChg chg="add del mod">
-          <ac:chgData name="馬場　碧生" userId="242fe924-956f-4f80-97d5-7a3231fdf9ba" providerId="ADAL" clId="{E59E2DC9-86A0-43C6-AC92-2955BB4E7CDD}" dt="2026-02-06T01:11:31.233" v="1169" actId="478"/>
-          <ac:cxnSpMkLst>
-            <pc:docMk/>
-            <pc:sldMk cId="2993221000" sldId="260"/>
-            <ac:cxnSpMk id="83" creationId="{BCDF3A5A-46DC-49AF-A325-F21D81A893E9}"/>
-          </ac:cxnSpMkLst>
-        </pc:cxnChg>
-        <pc:cxnChg chg="add del mod">
-          <ac:chgData name="馬場　碧生" userId="242fe924-956f-4f80-97d5-7a3231fdf9ba" providerId="ADAL" clId="{E59E2DC9-86A0-43C6-AC92-2955BB4E7CDD}" dt="2026-02-06T01:11:34.502" v="1176" actId="478"/>
-          <ac:cxnSpMkLst>
-            <pc:docMk/>
-            <pc:sldMk cId="2993221000" sldId="260"/>
-            <ac:cxnSpMk id="84" creationId="{D731ACA2-C9D0-4870-BF20-D9E41FD27F26}"/>
-          </ac:cxnSpMkLst>
-        </pc:cxnChg>
-        <pc:cxnChg chg="add del mod">
-          <ac:chgData name="馬場　碧生" userId="242fe924-956f-4f80-97d5-7a3231fdf9ba" providerId="ADAL" clId="{E59E2DC9-86A0-43C6-AC92-2955BB4E7CDD}" dt="2026-02-06T01:22:25.070" v="1347" actId="478"/>
-          <ac:cxnSpMkLst>
-            <pc:docMk/>
-            <pc:sldMk cId="2993221000" sldId="260"/>
-            <ac:cxnSpMk id="85" creationId="{FC7F4411-83C8-4C62-AE64-8594AF7651AC}"/>
-          </ac:cxnSpMkLst>
-        </pc:cxnChg>
-        <pc:cxnChg chg="add del mod">
-          <ac:chgData name="馬場　碧生" userId="242fe924-956f-4f80-97d5-7a3231fdf9ba" providerId="ADAL" clId="{E59E2DC9-86A0-43C6-AC92-2955BB4E7CDD}" dt="2026-02-06T01:11:30.583" v="1168" actId="478"/>
-          <ac:cxnSpMkLst>
-            <pc:docMk/>
-            <pc:sldMk cId="2993221000" sldId="260"/>
-            <ac:cxnSpMk id="86" creationId="{B74A58E4-AD84-44A5-B654-5FCB815984A1}"/>
-          </ac:cxnSpMkLst>
-        </pc:cxnChg>
-        <pc:cxnChg chg="add del mod">
-          <ac:chgData name="馬場　碧生" userId="242fe924-956f-4f80-97d5-7a3231fdf9ba" providerId="ADAL" clId="{E59E2DC9-86A0-43C6-AC92-2955BB4E7CDD}" dt="2026-02-06T01:22:25.070" v="1347" actId="478"/>
-          <ac:cxnSpMkLst>
-            <pc:docMk/>
-            <pc:sldMk cId="2993221000" sldId="260"/>
-            <ac:cxnSpMk id="87" creationId="{F2EB200F-FAD7-4EE1-A454-637B98A2AA6D}"/>
-          </ac:cxnSpMkLst>
-        </pc:cxnChg>
-        <pc:cxnChg chg="add del mod">
-          <ac:chgData name="馬場　碧生" userId="242fe924-956f-4f80-97d5-7a3231fdf9ba" providerId="ADAL" clId="{E59E2DC9-86A0-43C6-AC92-2955BB4E7CDD}" dt="2026-02-06T01:11:11.494" v="1150" actId="478"/>
-          <ac:cxnSpMkLst>
-            <pc:docMk/>
-            <pc:sldMk cId="2993221000" sldId="260"/>
-            <ac:cxnSpMk id="88" creationId="{55BC2668-9AFB-4864-8EEB-E739593B16C2}"/>
-          </ac:cxnSpMkLst>
-        </pc:cxnChg>
-        <pc:cxnChg chg="add del mod">
-          <ac:chgData name="馬場　碧生" userId="242fe924-956f-4f80-97d5-7a3231fdf9ba" providerId="ADAL" clId="{E59E2DC9-86A0-43C6-AC92-2955BB4E7CDD}" dt="2026-02-06T01:11:32.797" v="1172" actId="478"/>
-          <ac:cxnSpMkLst>
-            <pc:docMk/>
-            <pc:sldMk cId="2993221000" sldId="260"/>
-            <ac:cxnSpMk id="89" creationId="{290D0F87-7092-4B28-AB87-4572BD5E73BD}"/>
-          </ac:cxnSpMkLst>
-        </pc:cxnChg>
-        <pc:cxnChg chg="add del mod">
-          <ac:chgData name="馬場　碧生" userId="242fe924-956f-4f80-97d5-7a3231fdf9ba" providerId="ADAL" clId="{E59E2DC9-86A0-43C6-AC92-2955BB4E7CDD}" dt="2026-02-06T01:22:25.070" v="1347" actId="478"/>
-          <ac:cxnSpMkLst>
-            <pc:docMk/>
-            <pc:sldMk cId="2993221000" sldId="260"/>
-            <ac:cxnSpMk id="90" creationId="{592867A1-B021-4BEF-96C4-12F9698FF23A}"/>
-          </ac:cxnSpMkLst>
-        </pc:cxnChg>
-        <pc:cxnChg chg="add del mod">
-          <ac:chgData name="馬場　碧生" userId="242fe924-956f-4f80-97d5-7a3231fdf9ba" providerId="ADAL" clId="{E59E2DC9-86A0-43C6-AC92-2955BB4E7CDD}" dt="2026-02-06T01:11:21.782" v="1163" actId="478"/>
-          <ac:cxnSpMkLst>
-            <pc:docMk/>
-            <pc:sldMk cId="2993221000" sldId="260"/>
-            <ac:cxnSpMk id="91" creationId="{08E35EBB-D8BE-46C1-BAA5-49EA3C7BD96D}"/>
-          </ac:cxnSpMkLst>
-        </pc:cxnChg>
-        <pc:cxnChg chg="add del mod">
-          <ac:chgData name="馬場　碧生" userId="242fe924-956f-4f80-97d5-7a3231fdf9ba" providerId="ADAL" clId="{E59E2DC9-86A0-43C6-AC92-2955BB4E7CDD}" dt="2026-02-06T01:11:34.098" v="1175" actId="478"/>
-          <ac:cxnSpMkLst>
-            <pc:docMk/>
-            <pc:sldMk cId="2993221000" sldId="260"/>
-            <ac:cxnSpMk id="92" creationId="{D14061E5-7755-4C9B-B214-5C654054EFEE}"/>
-          </ac:cxnSpMkLst>
-        </pc:cxnChg>
-        <pc:cxnChg chg="add del mod">
-          <ac:chgData name="馬場　碧生" userId="242fe924-956f-4f80-97d5-7a3231fdf9ba" providerId="ADAL" clId="{E59E2DC9-86A0-43C6-AC92-2955BB4E7CDD}" dt="2026-02-06T01:11:33.241" v="1173" actId="478"/>
-          <ac:cxnSpMkLst>
-            <pc:docMk/>
-            <pc:sldMk cId="2993221000" sldId="260"/>
-            <ac:cxnSpMk id="93" creationId="{B33F037E-B8C4-4691-AFEC-6C66B5F55D95}"/>
-          </ac:cxnSpMkLst>
-        </pc:cxnChg>
-        <pc:cxnChg chg="add del mod">
-          <ac:chgData name="馬場　碧生" userId="242fe924-956f-4f80-97d5-7a3231fdf9ba" providerId="ADAL" clId="{E59E2DC9-86A0-43C6-AC92-2955BB4E7CDD}" dt="2026-02-06T01:22:25.070" v="1347" actId="478"/>
-          <ac:cxnSpMkLst>
-            <pc:docMk/>
-            <pc:sldMk cId="2993221000" sldId="260"/>
-            <ac:cxnSpMk id="96" creationId="{DF47F2B5-9BD9-46CB-AB5B-33FCAE62CAF5}"/>
-          </ac:cxnSpMkLst>
-        </pc:cxnChg>
-        <pc:cxnChg chg="add del mod">
-          <ac:chgData name="馬場　碧生" userId="242fe924-956f-4f80-97d5-7a3231fdf9ba" providerId="ADAL" clId="{E59E2DC9-86A0-43C6-AC92-2955BB4E7CDD}" dt="2026-02-06T01:22:25.070" v="1347" actId="478"/>
-          <ac:cxnSpMkLst>
-            <pc:docMk/>
-            <pc:sldMk cId="2993221000" sldId="260"/>
-            <ac:cxnSpMk id="97" creationId="{7A9BF0DC-0286-46FD-98D6-D3F843184342}"/>
-          </ac:cxnSpMkLst>
-        </pc:cxnChg>
-        <pc:cxnChg chg="add del mod">
-          <ac:chgData name="馬場　碧生" userId="242fe924-956f-4f80-97d5-7a3231fdf9ba" providerId="ADAL" clId="{E59E2DC9-86A0-43C6-AC92-2955BB4E7CDD}" dt="2026-02-06T01:22:25.070" v="1347" actId="478"/>
-          <ac:cxnSpMkLst>
-            <pc:docMk/>
-            <pc:sldMk cId="2993221000" sldId="260"/>
-            <ac:cxnSpMk id="98" creationId="{4768E4AD-1552-4BC5-9219-578213F45895}"/>
-          </ac:cxnSpMkLst>
-        </pc:cxnChg>
-        <pc:cxnChg chg="add del mod">
-          <ac:chgData name="馬場　碧生" userId="242fe924-956f-4f80-97d5-7a3231fdf9ba" providerId="ADAL" clId="{E59E2DC9-86A0-43C6-AC92-2955BB4E7CDD}" dt="2026-02-06T01:22:25.070" v="1347" actId="478"/>
-          <ac:cxnSpMkLst>
-            <pc:docMk/>
-            <pc:sldMk cId="2993221000" sldId="260"/>
-            <ac:cxnSpMk id="99" creationId="{E44FDE7A-66CC-45A4-B2E1-95905B4AC3A5}"/>
-          </ac:cxnSpMkLst>
-        </pc:cxnChg>
-        <pc:cxnChg chg="add del mod">
-          <ac:chgData name="馬場　碧生" userId="242fe924-956f-4f80-97d5-7a3231fdf9ba" providerId="ADAL" clId="{E59E2DC9-86A0-43C6-AC92-2955BB4E7CDD}" dt="2026-02-06T01:22:25.070" v="1347" actId="478"/>
-          <ac:cxnSpMkLst>
-            <pc:docMk/>
-            <pc:sldMk cId="2993221000" sldId="260"/>
-            <ac:cxnSpMk id="100" creationId="{8C440ED4-6F7B-457E-8E21-C1B4EE54EEEE}"/>
-          </ac:cxnSpMkLst>
-        </pc:cxnChg>
-        <pc:cxnChg chg="add del mod">
-          <ac:chgData name="馬場　碧生" userId="242fe924-956f-4f80-97d5-7a3231fdf9ba" providerId="ADAL" clId="{E59E2DC9-86A0-43C6-AC92-2955BB4E7CDD}" dt="2026-02-06T01:22:25.070" v="1347" actId="478"/>
-          <ac:cxnSpMkLst>
-            <pc:docMk/>
-            <pc:sldMk cId="2993221000" sldId="260"/>
-            <ac:cxnSpMk id="101" creationId="{C391EDDA-BEDC-4BE2-9F42-8FAB992B9103}"/>
-          </ac:cxnSpMkLst>
-        </pc:cxnChg>
-        <pc:cxnChg chg="add del mod">
-          <ac:chgData name="馬場　碧生" userId="242fe924-956f-4f80-97d5-7a3231fdf9ba" providerId="ADAL" clId="{E59E2DC9-86A0-43C6-AC92-2955BB4E7CDD}" dt="2026-02-06T01:22:25.070" v="1347" actId="478"/>
-          <ac:cxnSpMkLst>
-            <pc:docMk/>
-            <pc:sldMk cId="2993221000" sldId="260"/>
-            <ac:cxnSpMk id="102" creationId="{8364A7A6-0E17-4FF5-9F10-43845336F7C4}"/>
-          </ac:cxnSpMkLst>
-        </pc:cxnChg>
-        <pc:cxnChg chg="add del mod">
-          <ac:chgData name="馬場　碧生" userId="242fe924-956f-4f80-97d5-7a3231fdf9ba" providerId="ADAL" clId="{E59E2DC9-86A0-43C6-AC92-2955BB4E7CDD}" dt="2026-02-06T01:22:25.070" v="1347" actId="478"/>
-          <ac:cxnSpMkLst>
-            <pc:docMk/>
-            <pc:sldMk cId="2993221000" sldId="260"/>
-            <ac:cxnSpMk id="103" creationId="{6B639B14-6BF3-4441-A660-142C40A47E7D}"/>
-          </ac:cxnSpMkLst>
-        </pc:cxnChg>
-        <pc:cxnChg chg="add del mod">
-          <ac:chgData name="馬場　碧生" userId="242fe924-956f-4f80-97d5-7a3231fdf9ba" providerId="ADAL" clId="{E59E2DC9-86A0-43C6-AC92-2955BB4E7CDD}" dt="2026-02-06T01:22:25.070" v="1347" actId="478"/>
-          <ac:cxnSpMkLst>
-            <pc:docMk/>
-            <pc:sldMk cId="2993221000" sldId="260"/>
-            <ac:cxnSpMk id="104" creationId="{156CE7B2-8D48-4D59-B6BF-F07A8707982A}"/>
-          </ac:cxnSpMkLst>
-        </pc:cxnChg>
-        <pc:cxnChg chg="add del mod">
-          <ac:chgData name="馬場　碧生" userId="242fe924-956f-4f80-97d5-7a3231fdf9ba" providerId="ADAL" clId="{E59E2DC9-86A0-43C6-AC92-2955BB4E7CDD}" dt="2026-02-06T01:22:25.070" v="1347" actId="478"/>
-          <ac:cxnSpMkLst>
-            <pc:docMk/>
-            <pc:sldMk cId="2993221000" sldId="260"/>
-            <ac:cxnSpMk id="105" creationId="{A4398212-678B-4223-8C58-E27709B4870E}"/>
-          </ac:cxnSpMkLst>
-        </pc:cxnChg>
-      </pc:sldChg>
-      <pc:sldChg chg="addSp modSp mod">
-        <pc:chgData name="馬場　碧生" userId="242fe924-956f-4f80-97d5-7a3231fdf9ba" providerId="ADAL" clId="{E59E2DC9-86A0-43C6-AC92-2955BB4E7CDD}" dt="2026-02-09T00:33:58.709" v="2242" actId="20577"/>
-        <pc:sldMkLst>
-          <pc:docMk/>
-          <pc:sldMk cId="3634880873" sldId="265"/>
-        </pc:sldMkLst>
-        <pc:spChg chg="add mod">
-          <ac:chgData name="馬場　碧生" userId="242fe924-956f-4f80-97d5-7a3231fdf9ba" providerId="ADAL" clId="{E59E2DC9-86A0-43C6-AC92-2955BB4E7CDD}" dt="2026-02-05T02:50:02.841" v="642" actId="1076"/>
-          <ac:spMkLst>
-            <pc:docMk/>
-            <pc:sldMk cId="3634880873" sldId="265"/>
-            <ac:spMk id="2" creationId="{CE6C5DEC-BC22-4BB3-BD5F-D2BB46836716}"/>
-          </ac:spMkLst>
-        </pc:spChg>
-        <pc:spChg chg="mod">
-          <ac:chgData name="馬場　碧生" userId="242fe924-956f-4f80-97d5-7a3231fdf9ba" providerId="ADAL" clId="{E59E2DC9-86A0-43C6-AC92-2955BB4E7CDD}" dt="2026-02-09T00:33:58.709" v="2242" actId="20577"/>
-          <ac:spMkLst>
-            <pc:docMk/>
-            <pc:sldMk cId="3634880873" sldId="265"/>
-            <ac:spMk id="5" creationId="{47F7347A-29CB-4C01-8514-32C3ED84B27F}"/>
-          </ac:spMkLst>
-        </pc:spChg>
-      </pc:sldChg>
-      <pc:sldChg chg="addSp modSp new mod">
-        <pc:chgData name="馬場　碧生" userId="242fe924-956f-4f80-97d5-7a3231fdf9ba" providerId="ADAL" clId="{E59E2DC9-86A0-43C6-AC92-2955BB4E7CDD}" dt="2026-02-05T02:15:16.459" v="57"/>
-        <pc:sldMkLst>
-          <pc:docMk/>
-          <pc:sldMk cId="3120360329" sldId="266"/>
-        </pc:sldMkLst>
-        <pc:graphicFrameChg chg="add mod modGraphic">
-          <ac:chgData name="馬場　碧生" userId="242fe924-956f-4f80-97d5-7a3231fdf9ba" providerId="ADAL" clId="{E59E2DC9-86A0-43C6-AC92-2955BB4E7CDD}" dt="2026-02-05T02:15:05.856" v="55" actId="14734"/>
-          <ac:graphicFrameMkLst>
-            <pc:docMk/>
-            <pc:sldMk cId="3120360329" sldId="266"/>
-            <ac:graphicFrameMk id="2" creationId="{B9CDE8D6-11CB-43A1-8517-E9E3CAE571DD}"/>
-          </ac:graphicFrameMkLst>
-        </pc:graphicFrameChg>
-        <pc:graphicFrameChg chg="add mod modGraphic">
-          <ac:chgData name="馬場　碧生" userId="242fe924-956f-4f80-97d5-7a3231fdf9ba" providerId="ADAL" clId="{E59E2DC9-86A0-43C6-AC92-2955BB4E7CDD}" dt="2026-02-05T02:15:16.459" v="57"/>
-          <ac:graphicFrameMkLst>
-            <pc:docMk/>
-            <pc:sldMk cId="3120360329" sldId="266"/>
-            <ac:graphicFrameMk id="3" creationId="{3D0E594F-BE7B-4047-9FDB-25253F02A709}"/>
-          </ac:graphicFrameMkLst>
-        </pc:graphicFrameChg>
-      </pc:sldChg>
-      <pc:sldChg chg="addSp delSp modSp new mod">
-        <pc:chgData name="馬場　碧生" userId="242fe924-956f-4f80-97d5-7a3231fdf9ba" providerId="ADAL" clId="{E59E2DC9-86A0-43C6-AC92-2955BB4E7CDD}" dt="2026-02-09T00:50:51.414" v="2361" actId="207"/>
-        <pc:sldMkLst>
-          <pc:docMk/>
-          <pc:sldMk cId="446352604" sldId="267"/>
-        </pc:sldMkLst>
-        <pc:spChg chg="del">
-          <ac:chgData name="馬場　碧生" userId="242fe924-956f-4f80-97d5-7a3231fdf9ba" providerId="ADAL" clId="{E59E2DC9-86A0-43C6-AC92-2955BB4E7CDD}" dt="2026-02-06T01:17:32.549" v="1226" actId="478"/>
-          <ac:spMkLst>
-            <pc:docMk/>
-            <pc:sldMk cId="446352604" sldId="267"/>
-            <ac:spMk id="2" creationId="{A4D3D8D0-3B26-4D71-A667-BE915EA29906}"/>
-          </ac:spMkLst>
-        </pc:spChg>
-        <pc:spChg chg="del">
-          <ac:chgData name="馬場　碧生" userId="242fe924-956f-4f80-97d5-7a3231fdf9ba" providerId="ADAL" clId="{E59E2DC9-86A0-43C6-AC92-2955BB4E7CDD}" dt="2026-02-06T01:17:35.049" v="1227" actId="478"/>
-          <ac:spMkLst>
-            <pc:docMk/>
-            <pc:sldMk cId="446352604" sldId="267"/>
-            <ac:spMk id="3" creationId="{CF2C3478-0ADA-4A56-9A3C-77A76542B711}"/>
-          </ac:spMkLst>
-        </pc:spChg>
-        <pc:spChg chg="add mod">
-          <ac:chgData name="馬場　碧生" userId="242fe924-956f-4f80-97d5-7a3231fdf9ba" providerId="ADAL" clId="{E59E2DC9-86A0-43C6-AC92-2955BB4E7CDD}" dt="2026-02-06T01:21:21.862" v="1339" actId="207"/>
-          <ac:spMkLst>
-            <pc:docMk/>
-            <pc:sldMk cId="446352604" sldId="267"/>
-            <ac:spMk id="4" creationId="{AF90CD3E-0D3B-4B6C-9EA9-BF5C5A85C530}"/>
-          </ac:spMkLst>
-        </pc:spChg>
-        <pc:spChg chg="add del mod">
-          <ac:chgData name="馬場　碧生" userId="242fe924-956f-4f80-97d5-7a3231fdf9ba" providerId="ADAL" clId="{E59E2DC9-86A0-43C6-AC92-2955BB4E7CDD}" dt="2026-02-06T03:27:14.537" v="2170"/>
-          <ac:spMkLst>
-            <pc:docMk/>
-            <pc:sldMk cId="446352604" sldId="267"/>
-            <ac:spMk id="5" creationId="{EA081889-104D-4526-AA87-1D0EB4BBFD5A}"/>
-          </ac:spMkLst>
-        </pc:spChg>
-        <pc:spChg chg="add mod ord">
-          <ac:chgData name="馬場　碧生" userId="242fe924-956f-4f80-97d5-7a3231fdf9ba" providerId="ADAL" clId="{E59E2DC9-86A0-43C6-AC92-2955BB4E7CDD}" dt="2026-02-06T01:21:12.709" v="1337" actId="14100"/>
-          <ac:spMkLst>
-            <pc:docMk/>
-            <pc:sldMk cId="446352604" sldId="267"/>
-            <ac:spMk id="6" creationId="{34B27AA1-7DD9-4C0F-A74D-2014A9B5432D}"/>
-          </ac:spMkLst>
-        </pc:spChg>
-        <pc:spChg chg="add mod">
-          <ac:chgData name="馬場　碧生" userId="242fe924-956f-4f80-97d5-7a3231fdf9ba" providerId="ADAL" clId="{E59E2DC9-86A0-43C6-AC92-2955BB4E7CDD}" dt="2026-02-06T03:30:52.631" v="2215" actId="1076"/>
-          <ac:spMkLst>
-            <pc:docMk/>
-            <pc:sldMk cId="446352604" sldId="267"/>
-            <ac:spMk id="7" creationId="{07F2643F-03B5-45FC-9501-F4B492CA4450}"/>
-          </ac:spMkLst>
-        </pc:spChg>
-        <pc:spChg chg="add mod">
-          <ac:chgData name="馬場　碧生" userId="242fe924-956f-4f80-97d5-7a3231fdf9ba" providerId="ADAL" clId="{E59E2DC9-86A0-43C6-AC92-2955BB4E7CDD}" dt="2026-02-09T00:44:20.793" v="2322" actId="1076"/>
-          <ac:spMkLst>
-            <pc:docMk/>
-            <pc:sldMk cId="446352604" sldId="267"/>
-            <ac:spMk id="22" creationId="{E77ADE6D-1324-4280-A346-9CB48ADD86D6}"/>
-          </ac:spMkLst>
-        </pc:spChg>
-        <pc:spChg chg="add mod">
-          <ac:chgData name="馬場　碧生" userId="242fe924-956f-4f80-97d5-7a3231fdf9ba" providerId="ADAL" clId="{E59E2DC9-86A0-43C6-AC92-2955BB4E7CDD}" dt="2026-02-09T00:44:21" v="2323" actId="1076"/>
-          <ac:spMkLst>
-            <pc:docMk/>
-            <pc:sldMk cId="446352604" sldId="267"/>
-            <ac:spMk id="24" creationId="{264CE64B-A87B-4B58-BC80-205723BC9714}"/>
-          </ac:spMkLst>
-        </pc:spChg>
-        <pc:spChg chg="add mod">
-          <ac:chgData name="馬場　碧生" userId="242fe924-956f-4f80-97d5-7a3231fdf9ba" providerId="ADAL" clId="{E59E2DC9-86A0-43C6-AC92-2955BB4E7CDD}" dt="2026-02-09T00:43:37.699" v="2307" actId="1076"/>
-          <ac:spMkLst>
-            <pc:docMk/>
-            <pc:sldMk cId="446352604" sldId="267"/>
-            <ac:spMk id="25" creationId="{FFA1D1A0-7CE2-465A-9799-22B6B7436200}"/>
-          </ac:spMkLst>
-        </pc:spChg>
-        <pc:spChg chg="add mod">
-          <ac:chgData name="馬場　碧生" userId="242fe924-956f-4f80-97d5-7a3231fdf9ba" providerId="ADAL" clId="{E59E2DC9-86A0-43C6-AC92-2955BB4E7CDD}" dt="2026-02-06T03:30:25.247" v="2211" actId="1076"/>
-          <ac:spMkLst>
-            <pc:docMk/>
-            <pc:sldMk cId="446352604" sldId="267"/>
-            <ac:spMk id="31" creationId="{C4B00E32-4D08-4A37-A62B-F93717A7F4A6}"/>
-          </ac:spMkLst>
-        </pc:spChg>
-        <pc:spChg chg="add mod ord">
-          <ac:chgData name="馬場　碧生" userId="242fe924-956f-4f80-97d5-7a3231fdf9ba" providerId="ADAL" clId="{E59E2DC9-86A0-43C6-AC92-2955BB4E7CDD}" dt="2026-02-06T03:30:25.247" v="2211" actId="1076"/>
-          <ac:spMkLst>
-            <pc:docMk/>
-            <pc:sldMk cId="446352604" sldId="267"/>
-            <ac:spMk id="32" creationId="{8272F0CF-879E-454D-AE0D-67DE7C75E37F}"/>
-          </ac:spMkLst>
-        </pc:spChg>
-        <pc:spChg chg="add del mod">
-          <ac:chgData name="馬場　碧生" userId="242fe924-956f-4f80-97d5-7a3231fdf9ba" providerId="ADAL" clId="{E59E2DC9-86A0-43C6-AC92-2955BB4E7CDD}" dt="2026-02-06T01:34:00.597" v="1493"/>
-          <ac:spMkLst>
-            <pc:docMk/>
-            <pc:sldMk cId="446352604" sldId="267"/>
-            <ac:spMk id="33" creationId="{63F93FE2-26E0-413F-90D5-A1AF731E273D}"/>
-          </ac:spMkLst>
-        </pc:spChg>
-        <pc:spChg chg="add del">
-          <ac:chgData name="馬場　碧生" userId="242fe924-956f-4f80-97d5-7a3231fdf9ba" providerId="ADAL" clId="{E59E2DC9-86A0-43C6-AC92-2955BB4E7CDD}" dt="2026-02-06T01:34:00.597" v="1491" actId="478"/>
-          <ac:spMkLst>
-            <pc:docMk/>
-            <pc:sldMk cId="446352604" sldId="267"/>
-            <ac:spMk id="45" creationId="{3AF0A216-4465-4538-B11A-1594281CE31D}"/>
-          </ac:spMkLst>
-        </pc:spChg>
-        <pc:spChg chg="add del">
-          <ac:chgData name="馬場　碧生" userId="242fe924-956f-4f80-97d5-7a3231fdf9ba" providerId="ADAL" clId="{E59E2DC9-86A0-43C6-AC92-2955BB4E7CDD}" dt="2026-02-06T01:34:23.125" v="1495" actId="11529"/>
-          <ac:spMkLst>
-            <pc:docMk/>
-            <pc:sldMk cId="446352604" sldId="267"/>
-            <ac:spMk id="46" creationId="{F83538F7-5B66-4F27-AB27-B7BF5E3C596C}"/>
-          </ac:spMkLst>
-        </pc:spChg>
-        <pc:spChg chg="add del mod">
-          <ac:chgData name="馬場　碧生" userId="242fe924-956f-4f80-97d5-7a3231fdf9ba" providerId="ADAL" clId="{E59E2DC9-86A0-43C6-AC92-2955BB4E7CDD}" dt="2026-02-06T01:34:40.865" v="1499" actId="478"/>
-          <ac:spMkLst>
-            <pc:docMk/>
-            <pc:sldMk cId="446352604" sldId="267"/>
-            <ac:spMk id="47" creationId="{3CDDCF96-8A55-481B-8DC0-48CDC3368545}"/>
-          </ac:spMkLst>
-        </pc:spChg>
-        <pc:spChg chg="add del mod">
-          <ac:chgData name="馬場　碧生" userId="242fe924-956f-4f80-97d5-7a3231fdf9ba" providerId="ADAL" clId="{E59E2DC9-86A0-43C6-AC92-2955BB4E7CDD}" dt="2026-02-06T01:35:29.865" v="1504" actId="478"/>
-          <ac:spMkLst>
-            <pc:docMk/>
-            <pc:sldMk cId="446352604" sldId="267"/>
-            <ac:spMk id="48" creationId="{7D590AE2-F2F4-428C-BA5D-E8E0AF120E42}"/>
-          </ac:spMkLst>
-        </pc:spChg>
-        <pc:spChg chg="add del mod ord">
-          <ac:chgData name="馬場　碧生" userId="242fe924-956f-4f80-97d5-7a3231fdf9ba" providerId="ADAL" clId="{E59E2DC9-86A0-43C6-AC92-2955BB4E7CDD}" dt="2026-02-06T01:40:00.024" v="1559" actId="478"/>
-          <ac:spMkLst>
-            <pc:docMk/>
-            <pc:sldMk cId="446352604" sldId="267"/>
-            <ac:spMk id="49" creationId="{60310BAA-FFAC-4003-82F1-B8B185EE048D}"/>
-          </ac:spMkLst>
-        </pc:spChg>
-        <pc:spChg chg="add mod">
-          <ac:chgData name="馬場　碧生" userId="242fe924-956f-4f80-97d5-7a3231fdf9ba" providerId="ADAL" clId="{E59E2DC9-86A0-43C6-AC92-2955BB4E7CDD}" dt="2026-02-06T03:30:29.946" v="2212" actId="1076"/>
-          <ac:spMkLst>
-            <pc:docMk/>
-            <pc:sldMk cId="446352604" sldId="267"/>
-            <ac:spMk id="50" creationId="{79D27F05-CF7C-432E-A191-12BF9795A6D5}"/>
-          </ac:spMkLst>
-        </pc:spChg>
-        <pc:spChg chg="add mod">
-          <ac:chgData name="馬場　碧生" userId="242fe924-956f-4f80-97d5-7a3231fdf9ba" providerId="ADAL" clId="{E59E2DC9-86A0-43C6-AC92-2955BB4E7CDD}" dt="2026-02-06T03:30:25.247" v="2211" actId="1076"/>
-          <ac:spMkLst>
-            <pc:docMk/>
-            <pc:sldMk cId="446352604" sldId="267"/>
-            <ac:spMk id="51" creationId="{27519060-0A6D-4421-A2D2-3FF9CACB209C}"/>
-          </ac:spMkLst>
-        </pc:spChg>
-        <pc:spChg chg="add mod">
-          <ac:chgData name="馬場　碧生" userId="242fe924-956f-4f80-97d5-7a3231fdf9ba" providerId="ADAL" clId="{E59E2DC9-86A0-43C6-AC92-2955BB4E7CDD}" dt="2026-02-06T03:30:17.134" v="2210" actId="1076"/>
-          <ac:spMkLst>
-            <pc:docMk/>
-            <pc:sldMk cId="446352604" sldId="267"/>
-            <ac:spMk id="54" creationId="{6EB01E6A-0EB7-4888-BB14-1D7C5AA56CE4}"/>
-          </ac:spMkLst>
-        </pc:spChg>
-        <pc:spChg chg="add mod">
-          <ac:chgData name="馬場　碧生" userId="242fe924-956f-4f80-97d5-7a3231fdf9ba" providerId="ADAL" clId="{E59E2DC9-86A0-43C6-AC92-2955BB4E7CDD}" dt="2026-02-06T03:32:09.211" v="2228" actId="1076"/>
-          <ac:spMkLst>
-            <pc:docMk/>
-            <pc:sldMk cId="446352604" sldId="267"/>
-            <ac:spMk id="56" creationId="{042945A7-65DC-41F5-96CF-C07E87147982}"/>
-          </ac:spMkLst>
-        </pc:spChg>
-        <pc:spChg chg="add mod">
-          <ac:chgData name="馬場　碧生" userId="242fe924-956f-4f80-97d5-7a3231fdf9ba" providerId="ADAL" clId="{E59E2DC9-86A0-43C6-AC92-2955BB4E7CDD}" dt="2026-02-06T03:31:39.072" v="2222" actId="1076"/>
-          <ac:spMkLst>
-            <pc:docMk/>
-            <pc:sldMk cId="446352604" sldId="267"/>
-            <ac:spMk id="58" creationId="{21B2E26C-B0B2-4C70-AB20-CF74F73A2F96}"/>
-          </ac:spMkLst>
-        </pc:spChg>
-        <pc:spChg chg="add mod ord">
-          <ac:chgData name="馬場　碧生" userId="242fe924-956f-4f80-97d5-7a3231fdf9ba" providerId="ADAL" clId="{E59E2DC9-86A0-43C6-AC92-2955BB4E7CDD}" dt="2026-02-06T03:31:39.072" v="2222" actId="1076"/>
-          <ac:spMkLst>
-            <pc:docMk/>
-            <pc:sldMk cId="446352604" sldId="267"/>
-            <ac:spMk id="59" creationId="{5A4DF955-A150-44CB-9FDE-5134DDF14D0C}"/>
-          </ac:spMkLst>
-        </pc:spChg>
-        <pc:spChg chg="add mod ord">
-          <ac:chgData name="馬場　碧生" userId="242fe924-956f-4f80-97d5-7a3231fdf9ba" providerId="ADAL" clId="{E59E2DC9-86A0-43C6-AC92-2955BB4E7CDD}" dt="2026-02-06T03:30:17.134" v="2210" actId="1076"/>
-          <ac:spMkLst>
-            <pc:docMk/>
-            <pc:sldMk cId="446352604" sldId="267"/>
-            <ac:spMk id="60" creationId="{BB31AF23-B5D4-46C6-BF5E-C5F8EA9679CB}"/>
-          </ac:spMkLst>
-        </pc:spChg>
-        <pc:spChg chg="add mod ord">
-          <ac:chgData name="馬場　碧生" userId="242fe924-956f-4f80-97d5-7a3231fdf9ba" providerId="ADAL" clId="{E59E2DC9-86A0-43C6-AC92-2955BB4E7CDD}" dt="2026-02-06T03:32:09.211" v="2228" actId="1076"/>
-          <ac:spMkLst>
-            <pc:docMk/>
-            <pc:sldMk cId="446352604" sldId="267"/>
-            <ac:spMk id="61" creationId="{E344E309-1692-4D02-98BC-B9EC91D1D578}"/>
-          </ac:spMkLst>
-        </pc:spChg>
-        <pc:spChg chg="add del mod">
-          <ac:chgData name="馬場　碧生" userId="242fe924-956f-4f80-97d5-7a3231fdf9ba" providerId="ADAL" clId="{E59E2DC9-86A0-43C6-AC92-2955BB4E7CDD}" dt="2026-02-06T02:31:59.948" v="1742" actId="478"/>
-          <ac:spMkLst>
-            <pc:docMk/>
-            <pc:sldMk cId="446352604" sldId="267"/>
-            <ac:spMk id="62" creationId="{23D2D35B-E042-465B-9C1F-F50B2D0308B1}"/>
-          </ac:spMkLst>
-        </pc:spChg>
-        <pc:spChg chg="add del mod">
-          <ac:chgData name="馬場　碧生" userId="242fe924-956f-4f80-97d5-7a3231fdf9ba" providerId="ADAL" clId="{E59E2DC9-86A0-43C6-AC92-2955BB4E7CDD}" dt="2026-02-06T02:26:11.891" v="1640"/>
-          <ac:spMkLst>
-            <pc:docMk/>
-            <pc:sldMk cId="446352604" sldId="267"/>
-            <ac:spMk id="63" creationId="{C8A8DF39-537A-40E7-A06F-67053D3518A7}"/>
-          </ac:spMkLst>
-        </pc:spChg>
-        <pc:spChg chg="add del mod">
-          <ac:chgData name="馬場　碧生" userId="242fe924-956f-4f80-97d5-7a3231fdf9ba" providerId="ADAL" clId="{E59E2DC9-86A0-43C6-AC92-2955BB4E7CDD}" dt="2026-02-06T02:26:11.522" v="1639"/>
-          <ac:spMkLst>
-            <pc:docMk/>
-            <pc:sldMk cId="446352604" sldId="267"/>
-            <ac:spMk id="64" creationId="{F848A2AC-1558-4BCF-8832-3F9C2380982D}"/>
-          </ac:spMkLst>
-        </pc:spChg>
-        <pc:spChg chg="add del mod">
-          <ac:chgData name="馬場　碧生" userId="242fe924-956f-4f80-97d5-7a3231fdf9ba" providerId="ADAL" clId="{E59E2DC9-86A0-43C6-AC92-2955BB4E7CDD}" dt="2026-02-06T02:26:11.349" v="1638"/>
-          <ac:spMkLst>
-            <pc:docMk/>
-            <pc:sldMk cId="446352604" sldId="267"/>
-            <ac:spMk id="65" creationId="{C3EB2BE6-DDD7-48C1-B285-7377DDD79071}"/>
-          </ac:spMkLst>
-        </pc:spChg>
-        <pc:spChg chg="add mod">
-          <ac:chgData name="馬場　碧生" userId="242fe924-956f-4f80-97d5-7a3231fdf9ba" providerId="ADAL" clId="{E59E2DC9-86A0-43C6-AC92-2955BB4E7CDD}" dt="2026-02-06T03:31:39.072" v="2222" actId="1076"/>
-          <ac:spMkLst>
-            <pc:docMk/>
-            <pc:sldMk cId="446352604" sldId="267"/>
-            <ac:spMk id="66" creationId="{503C50A8-73E9-4BB9-96B3-B3740FCAA50E}"/>
-          </ac:spMkLst>
-        </pc:spChg>
-        <pc:spChg chg="add del mod">
-          <ac:chgData name="馬場　碧生" userId="242fe924-956f-4f80-97d5-7a3231fdf9ba" providerId="ADAL" clId="{E59E2DC9-86A0-43C6-AC92-2955BB4E7CDD}" dt="2026-02-06T02:32:01.517" v="1743" actId="478"/>
-          <ac:spMkLst>
-            <pc:docMk/>
-            <pc:sldMk cId="446352604" sldId="267"/>
-            <ac:spMk id="67" creationId="{6FE5D2FB-B285-4DBF-A2EF-A2E898C70A27}"/>
-          </ac:spMkLst>
-        </pc:spChg>
-        <pc:spChg chg="add del mod">
-          <ac:chgData name="馬場　碧生" userId="242fe924-956f-4f80-97d5-7a3231fdf9ba" providerId="ADAL" clId="{E59E2DC9-86A0-43C6-AC92-2955BB4E7CDD}" dt="2026-02-06T02:32:02.313" v="1744" actId="478"/>
-          <ac:spMkLst>
-            <pc:docMk/>
-            <pc:sldMk cId="446352604" sldId="267"/>
-            <ac:spMk id="68" creationId="{F8B20C31-2CF1-4501-AEA5-2B7749B1EFB9}"/>
-          </ac:spMkLst>
-        </pc:spChg>
-        <pc:spChg chg="add mod">
-          <ac:chgData name="馬場　碧生" userId="242fe924-956f-4f80-97d5-7a3231fdf9ba" providerId="ADAL" clId="{E59E2DC9-86A0-43C6-AC92-2955BB4E7CDD}" dt="2026-02-06T03:31:47.885" v="2223" actId="1076"/>
-          <ac:spMkLst>
-            <pc:docMk/>
-            <pc:sldMk cId="446352604" sldId="267"/>
-            <ac:spMk id="69" creationId="{86CD0742-FC52-4580-A06F-7134A313820D}"/>
-          </ac:spMkLst>
-        </pc:spChg>
-        <pc:spChg chg="add del mod">
-          <ac:chgData name="馬場　碧生" userId="242fe924-956f-4f80-97d5-7a3231fdf9ba" providerId="ADAL" clId="{E59E2DC9-86A0-43C6-AC92-2955BB4E7CDD}" dt="2026-02-06T02:27:43.228" v="1671"/>
-          <ac:spMkLst>
-            <pc:docMk/>
-            <pc:sldMk cId="446352604" sldId="267"/>
-            <ac:spMk id="70" creationId="{48E81197-D7D3-4DD7-8326-DA8BFC09B0F8}"/>
-          </ac:spMkLst>
-        </pc:spChg>
-        <pc:spChg chg="add del mod">
-          <ac:chgData name="馬場　碧生" userId="242fe924-956f-4f80-97d5-7a3231fdf9ba" providerId="ADAL" clId="{E59E2DC9-86A0-43C6-AC92-2955BB4E7CDD}" dt="2026-02-06T02:27:43.056" v="1670"/>
-          <ac:spMkLst>
-            <pc:docMk/>
-            <pc:sldMk cId="446352604" sldId="267"/>
-            <ac:spMk id="71" creationId="{BB7A3107-114F-4901-9929-66A618B8692F}"/>
-          </ac:spMkLst>
-        </pc:spChg>
-        <pc:spChg chg="add del mod">
-          <ac:chgData name="馬場　碧生" userId="242fe924-956f-4f80-97d5-7a3231fdf9ba" providerId="ADAL" clId="{E59E2DC9-86A0-43C6-AC92-2955BB4E7CDD}" dt="2026-02-06T02:27:42.882" v="1669"/>
-          <ac:spMkLst>
-            <pc:docMk/>
-            <pc:sldMk cId="446352604" sldId="267"/>
-            <ac:spMk id="72" creationId="{FE7215F7-F703-48E6-A60E-523A36DF6D66}"/>
-          </ac:spMkLst>
-        </pc:spChg>
-        <pc:spChg chg="add del mod">
-          <ac:chgData name="馬場　碧生" userId="242fe924-956f-4f80-97d5-7a3231fdf9ba" providerId="ADAL" clId="{E59E2DC9-86A0-43C6-AC92-2955BB4E7CDD}" dt="2026-02-06T02:27:42.699" v="1668"/>
-          <ac:spMkLst>
-            <pc:docMk/>
-            <pc:sldMk cId="446352604" sldId="267"/>
-            <ac:spMk id="73" creationId="{ECC59E13-89B9-4FF2-85EB-9963DDFFE7BA}"/>
-          </ac:spMkLst>
-        </pc:spChg>
-        <pc:spChg chg="add del mod">
-          <ac:chgData name="馬場　碧生" userId="242fe924-956f-4f80-97d5-7a3231fdf9ba" providerId="ADAL" clId="{E59E2DC9-86A0-43C6-AC92-2955BB4E7CDD}" dt="2026-02-06T02:30:30.422" v="1724" actId="478"/>
-          <ac:spMkLst>
-            <pc:docMk/>
-            <pc:sldMk cId="446352604" sldId="267"/>
-            <ac:spMk id="74" creationId="{A515FD99-7758-4013-AF20-3B7EEE68E462}"/>
-          </ac:spMkLst>
-        </pc:spChg>
-        <pc:spChg chg="add del mod">
-          <ac:chgData name="馬場　碧生" userId="242fe924-956f-4f80-97d5-7a3231fdf9ba" providerId="ADAL" clId="{E59E2DC9-86A0-43C6-AC92-2955BB4E7CDD}" dt="2026-02-06T02:30:29.949" v="1723" actId="478"/>
-          <ac:spMkLst>
-            <pc:docMk/>
-            <pc:sldMk cId="446352604" sldId="267"/>
-            <ac:spMk id="75" creationId="{2E3B72D6-5098-471F-95A2-72FE539B4614}"/>
-          </ac:spMkLst>
-        </pc:spChg>
-        <pc:spChg chg="add mod">
-          <ac:chgData name="馬場　碧生" userId="242fe924-956f-4f80-97d5-7a3231fdf9ba" providerId="ADAL" clId="{E59E2DC9-86A0-43C6-AC92-2955BB4E7CDD}" dt="2026-02-06T03:31:39.072" v="2222" actId="1076"/>
-          <ac:spMkLst>
-            <pc:docMk/>
-            <pc:sldMk cId="446352604" sldId="267"/>
-            <ac:spMk id="76" creationId="{879CDB71-F12D-438E-9855-7BEC8191D79A}"/>
-          </ac:spMkLst>
-        </pc:spChg>
-        <pc:spChg chg="add mod">
-          <ac:chgData name="馬場　碧生" userId="242fe924-956f-4f80-97d5-7a3231fdf9ba" providerId="ADAL" clId="{E59E2DC9-86A0-43C6-AC92-2955BB4E7CDD}" dt="2026-02-06T03:31:39.072" v="2222" actId="1076"/>
-          <ac:spMkLst>
-            <pc:docMk/>
-            <pc:sldMk cId="446352604" sldId="267"/>
-            <ac:spMk id="77" creationId="{2A708A3C-69A9-41A8-8E1B-ADF68CC662C5}"/>
-          </ac:spMkLst>
-        </pc:spChg>
-        <pc:spChg chg="add mod">
-          <ac:chgData name="馬場　碧生" userId="242fe924-956f-4f80-97d5-7a3231fdf9ba" providerId="ADAL" clId="{E59E2DC9-86A0-43C6-AC92-2955BB4E7CDD}" dt="2026-02-06T03:31:39.072" v="2222" actId="1076"/>
-          <ac:spMkLst>
-            <pc:docMk/>
-            <pc:sldMk cId="446352604" sldId="267"/>
-            <ac:spMk id="78" creationId="{66EE8260-AC7F-4DC2-A0CC-4A870E76B9CA}"/>
-          </ac:spMkLst>
-        </pc:spChg>
-        <pc:spChg chg="add del mod">
-          <ac:chgData name="馬場　碧生" userId="242fe924-956f-4f80-97d5-7a3231fdf9ba" providerId="ADAL" clId="{E59E2DC9-86A0-43C6-AC92-2955BB4E7CDD}" dt="2026-02-06T02:33:01.962" v="1800" actId="478"/>
-          <ac:spMkLst>
-            <pc:docMk/>
-            <pc:sldMk cId="446352604" sldId="267"/>
-            <ac:spMk id="99" creationId="{F8F5CC97-D056-4BCA-828C-2DDEC7D4BDA2}"/>
-          </ac:spMkLst>
-        </pc:spChg>
-        <pc:spChg chg="add del mod">
-          <ac:chgData name="馬場　碧生" userId="242fe924-956f-4f80-97d5-7a3231fdf9ba" providerId="ADAL" clId="{E59E2DC9-86A0-43C6-AC92-2955BB4E7CDD}" dt="2026-02-06T02:33:01.249" v="1799" actId="478"/>
-          <ac:spMkLst>
-            <pc:docMk/>
-            <pc:sldMk cId="446352604" sldId="267"/>
-            <ac:spMk id="100" creationId="{53E768F3-2BE1-4564-A948-7B806A0670C8}"/>
-          </ac:spMkLst>
-        </pc:spChg>
-        <pc:spChg chg="add del mod">
-          <ac:chgData name="馬場　碧生" userId="242fe924-956f-4f80-97d5-7a3231fdf9ba" providerId="ADAL" clId="{E59E2DC9-86A0-43C6-AC92-2955BB4E7CDD}" dt="2026-02-06T02:33:00.595" v="1798" actId="478"/>
-          <ac:spMkLst>
-            <pc:docMk/>
-            <pc:sldMk cId="446352604" sldId="267"/>
-            <ac:spMk id="101" creationId="{9552075A-E443-4FDC-910B-46831D673A53}"/>
-          </ac:spMkLst>
-        </pc:spChg>
-        <pc:spChg chg="add del mod">
-          <ac:chgData name="馬場　碧生" userId="242fe924-956f-4f80-97d5-7a3231fdf9ba" providerId="ADAL" clId="{E59E2DC9-86A0-43C6-AC92-2955BB4E7CDD}" dt="2026-02-06T02:32:37.849" v="1793"/>
-          <ac:spMkLst>
-            <pc:docMk/>
-            <pc:sldMk cId="446352604" sldId="267"/>
-            <ac:spMk id="102" creationId="{4C0D2025-FC07-49F5-BD0F-142AE3EFC3A7}"/>
-          </ac:spMkLst>
-        </pc:spChg>
-        <pc:spChg chg="add mod">
-          <ac:chgData name="馬場　碧生" userId="242fe924-956f-4f80-97d5-7a3231fdf9ba" providerId="ADAL" clId="{E59E2DC9-86A0-43C6-AC92-2955BB4E7CDD}" dt="2026-02-06T03:31:39.072" v="2222" actId="1076"/>
-          <ac:spMkLst>
-            <pc:docMk/>
-            <pc:sldMk cId="446352604" sldId="267"/>
-            <ac:spMk id="110" creationId="{D1DB24AA-D89F-4BDC-947E-AE75A5553A72}"/>
-          </ac:spMkLst>
-        </pc:spChg>
-        <pc:spChg chg="add mod">
-          <ac:chgData name="馬場　碧生" userId="242fe924-956f-4f80-97d5-7a3231fdf9ba" providerId="ADAL" clId="{E59E2DC9-86A0-43C6-AC92-2955BB4E7CDD}" dt="2026-02-06T03:31:39.072" v="2222" actId="1076"/>
-          <ac:spMkLst>
-            <pc:docMk/>
-            <pc:sldMk cId="446352604" sldId="267"/>
-            <ac:spMk id="111" creationId="{B72A36E5-D18F-439D-9F78-FB5DDC06B14F}"/>
-          </ac:spMkLst>
-        </pc:spChg>
-        <pc:spChg chg="add mod">
-          <ac:chgData name="馬場　碧生" userId="242fe924-956f-4f80-97d5-7a3231fdf9ba" providerId="ADAL" clId="{E59E2DC9-86A0-43C6-AC92-2955BB4E7CDD}" dt="2026-02-06T03:31:39.072" v="2222" actId="1076"/>
-          <ac:spMkLst>
-            <pc:docMk/>
-            <pc:sldMk cId="446352604" sldId="267"/>
-            <ac:spMk id="112" creationId="{14CF7E58-C9A7-4381-8468-5CB562F6407C}"/>
-          </ac:spMkLst>
-        </pc:spChg>
-        <pc:spChg chg="add mod">
-          <ac:chgData name="馬場　碧生" userId="242fe924-956f-4f80-97d5-7a3231fdf9ba" providerId="ADAL" clId="{E59E2DC9-86A0-43C6-AC92-2955BB4E7CDD}" dt="2026-02-06T03:31:39.072" v="2222" actId="1076"/>
-          <ac:spMkLst>
-            <pc:docMk/>
-            <pc:sldMk cId="446352604" sldId="267"/>
-            <ac:spMk id="113" creationId="{5A6A7525-765E-4CFA-9C01-AA51BAE60AC0}"/>
-          </ac:spMkLst>
-        </pc:spChg>
-        <pc:spChg chg="add mod">
-          <ac:chgData name="馬場　碧生" userId="242fe924-956f-4f80-97d5-7a3231fdf9ba" providerId="ADAL" clId="{E59E2DC9-86A0-43C6-AC92-2955BB4E7CDD}" dt="2026-02-06T03:31:39.072" v="2222" actId="1076"/>
-          <ac:spMkLst>
-            <pc:docMk/>
-            <pc:sldMk cId="446352604" sldId="267"/>
-            <ac:spMk id="114" creationId="{49AA939C-3153-4C56-B1EA-DC24CD810009}"/>
-          </ac:spMkLst>
-        </pc:spChg>
-        <pc:spChg chg="add del mod">
-          <ac:chgData name="馬場　碧生" userId="242fe924-956f-4f80-97d5-7a3231fdf9ba" providerId="ADAL" clId="{E59E2DC9-86A0-43C6-AC92-2955BB4E7CDD}" dt="2026-02-06T02:36:58.235" v="1866" actId="478"/>
-          <ac:spMkLst>
-            <pc:docMk/>
-            <pc:sldMk cId="446352604" sldId="267"/>
-            <ac:spMk id="115" creationId="{BB361417-08E2-4104-BA27-A6EE8BFDF5EA}"/>
-          </ac:spMkLst>
-        </pc:spChg>
-        <pc:spChg chg="add mod">
-          <ac:chgData name="馬場　碧生" userId="242fe924-956f-4f80-97d5-7a3231fdf9ba" providerId="ADAL" clId="{E59E2DC9-86A0-43C6-AC92-2955BB4E7CDD}" dt="2026-02-06T03:31:39.072" v="2222" actId="1076"/>
-          <ac:spMkLst>
-            <pc:docMk/>
-            <pc:sldMk cId="446352604" sldId="267"/>
-            <ac:spMk id="116" creationId="{1CB33D6B-5113-4A79-8DC8-ACD5D95C4125}"/>
-          </ac:spMkLst>
-        </pc:spChg>
-        <pc:spChg chg="add mod">
-          <ac:chgData name="馬場　碧生" userId="242fe924-956f-4f80-97d5-7a3231fdf9ba" providerId="ADAL" clId="{E59E2DC9-86A0-43C6-AC92-2955BB4E7CDD}" dt="2026-02-06T03:31:39.072" v="2222" actId="1076"/>
-          <ac:spMkLst>
-            <pc:docMk/>
-            <pc:sldMk cId="446352604" sldId="267"/>
-            <ac:spMk id="117" creationId="{5531074D-EB0C-491D-8C04-9E48A7BBEBBA}"/>
-          </ac:spMkLst>
-        </pc:spChg>
-        <pc:spChg chg="add del mod">
-          <ac:chgData name="馬場　碧生" userId="242fe924-956f-4f80-97d5-7a3231fdf9ba" providerId="ADAL" clId="{E59E2DC9-86A0-43C6-AC92-2955BB4E7CDD}" dt="2026-02-06T03:29:23.423" v="2203" actId="478"/>
-          <ac:spMkLst>
-            <pc:docMk/>
-            <pc:sldMk cId="446352604" sldId="267"/>
-            <ac:spMk id="118" creationId="{A9E966A7-9064-4B08-9656-6D50A7FC9885}"/>
-          </ac:spMkLst>
-        </pc:spChg>
-        <pc:spChg chg="add del mod">
-          <ac:chgData name="馬場　碧生" userId="242fe924-956f-4f80-97d5-7a3231fdf9ba" providerId="ADAL" clId="{E59E2DC9-86A0-43C6-AC92-2955BB4E7CDD}" dt="2026-02-06T02:43:06.529" v="1987" actId="478"/>
-          <ac:spMkLst>
-            <pc:docMk/>
-            <pc:sldMk cId="446352604" sldId="267"/>
-            <ac:spMk id="145" creationId="{548A9B7A-0ED6-4260-8F1D-BEC4A3DA5BD2}"/>
-          </ac:spMkLst>
-        </pc:spChg>
-        <pc:spChg chg="add del mod ord">
-          <ac:chgData name="馬場　碧生" userId="242fe924-956f-4f80-97d5-7a3231fdf9ba" providerId="ADAL" clId="{E59E2DC9-86A0-43C6-AC92-2955BB4E7CDD}" dt="2026-02-06T03:19:39.908" v="2109" actId="478"/>
-          <ac:spMkLst>
-            <pc:docMk/>
-            <pc:sldMk cId="446352604" sldId="267"/>
-            <ac:spMk id="160" creationId="{15CA858A-D4B2-491B-8F4A-CE7BE6376927}"/>
-          </ac:spMkLst>
-        </pc:spChg>
-        <pc:spChg chg="add mod">
-          <ac:chgData name="馬場　碧生" userId="242fe924-956f-4f80-97d5-7a3231fdf9ba" providerId="ADAL" clId="{E59E2DC9-86A0-43C6-AC92-2955BB4E7CDD}" dt="2026-02-06T03:31:39.072" v="2222" actId="1076"/>
-          <ac:spMkLst>
-            <pc:docMk/>
-            <pc:sldMk cId="446352604" sldId="267"/>
-            <ac:spMk id="179" creationId="{34D3C7A3-D676-429A-8339-AE152216A6CC}"/>
-          </ac:spMkLst>
-        </pc:spChg>
-        <pc:spChg chg="add mod">
-          <ac:chgData name="馬場　碧生" userId="242fe924-956f-4f80-97d5-7a3231fdf9ba" providerId="ADAL" clId="{E59E2DC9-86A0-43C6-AC92-2955BB4E7CDD}" dt="2026-02-06T03:31:39.072" v="2222" actId="1076"/>
-          <ac:spMkLst>
-            <pc:docMk/>
-            <pc:sldMk cId="446352604" sldId="267"/>
-            <ac:spMk id="180" creationId="{733C756E-06E2-43ED-A453-4B31D8E99EE5}"/>
-          </ac:spMkLst>
-        </pc:spChg>
-        <pc:spChg chg="add mod">
-          <ac:chgData name="馬場　碧生" userId="242fe924-956f-4f80-97d5-7a3231fdf9ba" providerId="ADAL" clId="{E59E2DC9-86A0-43C6-AC92-2955BB4E7CDD}" dt="2026-02-06T03:40:18.306" v="2235" actId="14100"/>
-          <ac:spMkLst>
-            <pc:docMk/>
-            <pc:sldMk cId="446352604" sldId="267"/>
-            <ac:spMk id="181" creationId="{B59EA596-BDC6-4531-9C7F-1E1492C8CB74}"/>
-          </ac:spMkLst>
-        </pc:spChg>
-        <pc:picChg chg="add mod">
-          <ac:chgData name="馬場　碧生" userId="242fe924-956f-4f80-97d5-7a3231fdf9ba" providerId="ADAL" clId="{E59E2DC9-86A0-43C6-AC92-2955BB4E7CDD}" dt="2026-02-09T00:40:15.953" v="2254" actId="1076"/>
-          <ac:picMkLst>
-            <pc:docMk/>
-            <pc:sldMk cId="446352604" sldId="267"/>
-            <ac:picMk id="3" creationId="{8F54712E-35FD-45F7-B32F-477AF378540C}"/>
-          </ac:picMkLst>
-        </pc:picChg>
-        <pc:picChg chg="add del mod">
-          <ac:chgData name="馬場　碧生" userId="242fe924-956f-4f80-97d5-7a3231fdf9ba" providerId="ADAL" clId="{E59E2DC9-86A0-43C6-AC92-2955BB4E7CDD}" dt="2026-02-09T00:44:25.165" v="2327" actId="478"/>
-          <ac:picMkLst>
-            <pc:docMk/>
-            <pc:sldMk cId="446352604" sldId="267"/>
-            <ac:picMk id="8" creationId="{965813AD-0A27-43F5-8EFD-55F605BBF794}"/>
-          </ac:picMkLst>
-        </pc:picChg>
-        <pc:picChg chg="add del mod">
-          <ac:chgData name="馬場　碧生" userId="242fe924-956f-4f80-97d5-7a3231fdf9ba" providerId="ADAL" clId="{E59E2DC9-86A0-43C6-AC92-2955BB4E7CDD}" dt="2026-02-09T00:46:09.477" v="2352" actId="478"/>
-          <ac:picMkLst>
-            <pc:docMk/>
-            <pc:sldMk cId="446352604" sldId="267"/>
-            <ac:picMk id="10" creationId="{C7FF2676-F028-41AF-9E00-38FC741EFD97}"/>
-          </ac:picMkLst>
-        </pc:picChg>
-        <pc:picChg chg="add mod">
-          <ac:chgData name="馬場　碧生" userId="242fe924-956f-4f80-97d5-7a3231fdf9ba" providerId="ADAL" clId="{E59E2DC9-86A0-43C6-AC92-2955BB4E7CDD}" dt="2026-02-09T00:50:51.414" v="2361" actId="207"/>
-          <ac:picMkLst>
-            <pc:docMk/>
-            <pc:sldMk cId="446352604" sldId="267"/>
-            <ac:picMk id="12" creationId="{341AA9F1-CE96-4E3D-83BA-5904DAF82805}"/>
-          </ac:picMkLst>
-        </pc:picChg>
-        <pc:picChg chg="add mod">
-          <ac:chgData name="馬場　碧生" userId="242fe924-956f-4f80-97d5-7a3231fdf9ba" providerId="ADAL" clId="{E59E2DC9-86A0-43C6-AC92-2955BB4E7CDD}" dt="2026-02-09T00:40:22.512" v="2256" actId="1076"/>
-          <ac:picMkLst>
-            <pc:docMk/>
-            <pc:sldMk cId="446352604" sldId="267"/>
-            <ac:picMk id="62" creationId="{C6F06846-1288-4B0A-AB8C-BDCAD5C86F06}"/>
-          </ac:picMkLst>
-        </pc:picChg>
-        <pc:picChg chg="add mod">
-          <ac:chgData name="馬場　碧生" userId="242fe924-956f-4f80-97d5-7a3231fdf9ba" providerId="ADAL" clId="{E59E2DC9-86A0-43C6-AC92-2955BB4E7CDD}" dt="2026-02-09T00:40:29.435" v="2258" actId="1076"/>
-          <ac:picMkLst>
-            <pc:docMk/>
-            <pc:sldMk cId="446352604" sldId="267"/>
-            <ac:picMk id="63" creationId="{DDEA3C89-5BB6-4851-91F8-177228169BA5}"/>
-          </ac:picMkLst>
-        </pc:picChg>
-        <pc:picChg chg="add mod">
-          <ac:chgData name="馬場　碧生" userId="242fe924-956f-4f80-97d5-7a3231fdf9ba" providerId="ADAL" clId="{E59E2DC9-86A0-43C6-AC92-2955BB4E7CDD}" dt="2026-02-09T00:40:37.283" v="2260" actId="1076"/>
-          <ac:picMkLst>
-            <pc:docMk/>
-            <pc:sldMk cId="446352604" sldId="267"/>
-            <ac:picMk id="64" creationId="{ED320427-0F31-450E-BB60-2D1D43428BE7}"/>
-          </ac:picMkLst>
-        </pc:picChg>
-        <pc:picChg chg="add mod">
-          <ac:chgData name="馬場　碧生" userId="242fe924-956f-4f80-97d5-7a3231fdf9ba" providerId="ADAL" clId="{E59E2DC9-86A0-43C6-AC92-2955BB4E7CDD}" dt="2026-02-09T00:44:41.813" v="2331" actId="1076"/>
-          <ac:picMkLst>
-            <pc:docMk/>
-            <pc:sldMk cId="446352604" sldId="267"/>
-            <ac:picMk id="65" creationId="{87BC7BA3-C66D-4E98-A0C2-D875E84B0559}"/>
-          </ac:picMkLst>
-        </pc:picChg>
-        <pc:picChg chg="add mod">
-          <ac:chgData name="馬場　碧生" userId="242fe924-956f-4f80-97d5-7a3231fdf9ba" providerId="ADAL" clId="{E59E2DC9-86A0-43C6-AC92-2955BB4E7CDD}" dt="2026-02-09T00:44:40.343" v="2330" actId="1076"/>
-          <ac:picMkLst>
-            <pc:docMk/>
-            <pc:sldMk cId="446352604" sldId="267"/>
-            <ac:picMk id="67" creationId="{09A9ADE5-81C1-4FE9-B8C8-ED2DD72E0EDB}"/>
-          </ac:picMkLst>
-        </pc:picChg>
-        <pc:picChg chg="add mod">
-          <ac:chgData name="馬場　碧生" userId="242fe924-956f-4f80-97d5-7a3231fdf9ba" providerId="ADAL" clId="{E59E2DC9-86A0-43C6-AC92-2955BB4E7CDD}" dt="2026-02-09T00:44:44.487" v="2332" actId="1076"/>
-          <ac:picMkLst>
-            <pc:docMk/>
-            <pc:sldMk cId="446352604" sldId="267"/>
-            <ac:picMk id="68" creationId="{B85A1C80-BDFC-4809-A932-364648472F36}"/>
-          </ac:picMkLst>
-        </pc:picChg>
-        <pc:picChg chg="add mod">
-          <ac:chgData name="馬場　碧生" userId="242fe924-956f-4f80-97d5-7a3231fdf9ba" providerId="ADAL" clId="{E59E2DC9-86A0-43C6-AC92-2955BB4E7CDD}" dt="2026-02-09T00:44:48.347" v="2333" actId="1076"/>
-          <ac:picMkLst>
-            <pc:docMk/>
-            <pc:sldMk cId="446352604" sldId="267"/>
-            <ac:picMk id="70" creationId="{51A38CC7-E198-4604-93B6-A1DE07995DB5}"/>
-          </ac:picMkLst>
-        </pc:picChg>
-        <pc:picChg chg="add mod">
-          <ac:chgData name="馬場　碧生" userId="242fe924-956f-4f80-97d5-7a3231fdf9ba" providerId="ADAL" clId="{E59E2DC9-86A0-43C6-AC92-2955BB4E7CDD}" dt="2026-02-09T00:44:51.286" v="2334" actId="1076"/>
-          <ac:picMkLst>
-            <pc:docMk/>
-            <pc:sldMk cId="446352604" sldId="267"/>
-            <ac:picMk id="71" creationId="{1810794C-2271-48B4-BC05-3D34330F8E5E}"/>
-          </ac:picMkLst>
-        </pc:picChg>
-        <pc:picChg chg="add mod">
-          <ac:chgData name="馬場　碧生" userId="242fe924-956f-4f80-97d5-7a3231fdf9ba" providerId="ADAL" clId="{E59E2DC9-86A0-43C6-AC92-2955BB4E7CDD}" dt="2026-02-09T00:41:48.516" v="2287" actId="1076"/>
-          <ac:picMkLst>
-            <pc:docMk/>
-            <pc:sldMk cId="446352604" sldId="267"/>
-            <ac:picMk id="72" creationId="{D67A660A-9AB5-44E6-AC18-E9050BF10D50}"/>
-          </ac:picMkLst>
-        </pc:picChg>
-        <pc:picChg chg="add mod">
-          <ac:chgData name="馬場　碧生" userId="242fe924-956f-4f80-97d5-7a3231fdf9ba" providerId="ADAL" clId="{E59E2DC9-86A0-43C6-AC92-2955BB4E7CDD}" dt="2026-02-09T00:50:44.012" v="2359" actId="1076"/>
-          <ac:picMkLst>
-            <pc:docMk/>
-            <pc:sldMk cId="446352604" sldId="267"/>
-            <ac:picMk id="73" creationId="{49518E81-34DB-4676-A35B-7B01A63258D2}"/>
-          </ac:picMkLst>
-        </pc:picChg>
-        <pc:picChg chg="add mod">
-          <ac:chgData name="馬場　碧生" userId="242fe924-956f-4f80-97d5-7a3231fdf9ba" providerId="ADAL" clId="{E59E2DC9-86A0-43C6-AC92-2955BB4E7CDD}" dt="2026-02-09T00:44:54.157" v="2336" actId="1076"/>
-          <ac:picMkLst>
-            <pc:docMk/>
-            <pc:sldMk cId="446352604" sldId="267"/>
-            <ac:picMk id="74" creationId="{0185D69E-4526-465F-8A5E-385C4F4D7B1C}"/>
-          </ac:picMkLst>
-        </pc:picChg>
-        <pc:picChg chg="add mod">
-          <ac:chgData name="馬場　碧生" userId="242fe924-956f-4f80-97d5-7a3231fdf9ba" providerId="ADAL" clId="{E59E2DC9-86A0-43C6-AC92-2955BB4E7CDD}" dt="2026-02-09T00:44:30.802" v="2328" actId="1076"/>
-          <ac:picMkLst>
-            <pc:docMk/>
-            <pc:sldMk cId="446352604" sldId="267"/>
-            <ac:picMk id="75" creationId="{D13259AB-B5BB-42FF-9804-8B0B0B796222}"/>
-          </ac:picMkLst>
-        </pc:picChg>
-        <pc:picChg chg="add mod">
-          <ac:chgData name="馬場　碧生" userId="242fe924-956f-4f80-97d5-7a3231fdf9ba" providerId="ADAL" clId="{E59E2DC9-86A0-43C6-AC92-2955BB4E7CDD}" dt="2026-02-09T00:44:52.907" v="2335" actId="1076"/>
-          <ac:picMkLst>
-            <pc:docMk/>
-            <pc:sldMk cId="446352604" sldId="267"/>
-            <ac:picMk id="79" creationId="{C30E118F-8659-4943-B6B4-BE2D92609EC4}"/>
-          </ac:picMkLst>
-        </pc:picChg>
-        <pc:picChg chg="add mod">
-          <ac:chgData name="馬場　碧生" userId="242fe924-956f-4f80-97d5-7a3231fdf9ba" providerId="ADAL" clId="{E59E2DC9-86A0-43C6-AC92-2955BB4E7CDD}" dt="2026-02-06T03:31:39.072" v="2222" actId="1076"/>
-          <ac:picMkLst>
-            <pc:docMk/>
-            <pc:sldMk cId="446352604" sldId="267"/>
-            <ac:picMk id="104" creationId="{96D32AD9-3AB0-4B64-97CF-6C9CB6BE055B}"/>
-          </ac:picMkLst>
-        </pc:picChg>
-        <pc:picChg chg="add mod">
-          <ac:chgData name="馬場　碧生" userId="242fe924-956f-4f80-97d5-7a3231fdf9ba" providerId="ADAL" clId="{E59E2DC9-86A0-43C6-AC92-2955BB4E7CDD}" dt="2026-02-06T03:31:39.072" v="2222" actId="1076"/>
-          <ac:picMkLst>
-            <pc:docMk/>
-            <pc:sldMk cId="446352604" sldId="267"/>
-            <ac:picMk id="105" creationId="{CB935BE2-7A36-43F4-8D24-A45517008543}"/>
-          </ac:picMkLst>
-        </pc:picChg>
-        <pc:picChg chg="add mod">
-          <ac:chgData name="馬場　碧生" userId="242fe924-956f-4f80-97d5-7a3231fdf9ba" providerId="ADAL" clId="{E59E2DC9-86A0-43C6-AC92-2955BB4E7CDD}" dt="2026-02-06T03:31:39.072" v="2222" actId="1076"/>
-          <ac:picMkLst>
-            <pc:docMk/>
-            <pc:sldMk cId="446352604" sldId="267"/>
-            <ac:picMk id="106" creationId="{26B5365B-4004-4D88-98D5-D92BB1BD41A4}"/>
-          </ac:picMkLst>
-        </pc:picChg>
-        <pc:picChg chg="add mod">
-          <ac:chgData name="馬場　碧生" userId="242fe924-956f-4f80-97d5-7a3231fdf9ba" providerId="ADAL" clId="{E59E2DC9-86A0-43C6-AC92-2955BB4E7CDD}" dt="2026-02-06T03:31:39.072" v="2222" actId="1076"/>
-          <ac:picMkLst>
-            <pc:docMk/>
-            <pc:sldMk cId="446352604" sldId="267"/>
-            <ac:picMk id="107" creationId="{98585C90-7D7A-4F7E-8EA5-04B009B68650}"/>
-          </ac:picMkLst>
-        </pc:picChg>
-        <pc:picChg chg="add del mod">
-          <ac:chgData name="馬場　碧生" userId="242fe924-956f-4f80-97d5-7a3231fdf9ba" providerId="ADAL" clId="{E59E2DC9-86A0-43C6-AC92-2955BB4E7CDD}" dt="2026-02-06T02:33:21.332" v="1814" actId="478"/>
-          <ac:picMkLst>
-            <pc:docMk/>
-            <pc:sldMk cId="446352604" sldId="267"/>
-            <ac:picMk id="108" creationId="{B3CCF426-061F-475B-B785-F80747A72C32}"/>
-          </ac:picMkLst>
-        </pc:picChg>
-        <pc:picChg chg="add mod">
-          <ac:chgData name="馬場　碧生" userId="242fe924-956f-4f80-97d5-7a3231fdf9ba" providerId="ADAL" clId="{E59E2DC9-86A0-43C6-AC92-2955BB4E7CDD}" dt="2026-02-06T03:31:39.072" v="2222" actId="1076"/>
-          <ac:picMkLst>
-            <pc:docMk/>
-            <pc:sldMk cId="446352604" sldId="267"/>
-            <ac:picMk id="119" creationId="{235CE857-38A3-4519-87CB-C76C552A989D}"/>
-          </ac:picMkLst>
-        </pc:picChg>
-        <pc:picChg chg="add del mod">
-          <ac:chgData name="馬場　碧生" userId="242fe924-956f-4f80-97d5-7a3231fdf9ba" providerId="ADAL" clId="{E59E2DC9-86A0-43C6-AC92-2955BB4E7CDD}" dt="2026-02-06T03:26:49.159" v="2161" actId="478"/>
-          <ac:picMkLst>
-            <pc:docMk/>
-            <pc:sldMk cId="446352604" sldId="267"/>
-            <ac:picMk id="126" creationId="{AB866DBF-1A56-4744-B3E8-F4B8205F5FF1}"/>
-          </ac:picMkLst>
-        </pc:picChg>
-        <pc:picChg chg="add del mod">
-          <ac:chgData name="馬場　碧生" userId="242fe924-956f-4f80-97d5-7a3231fdf9ba" providerId="ADAL" clId="{E59E2DC9-86A0-43C6-AC92-2955BB4E7CDD}" dt="2026-02-06T02:40:31.395" v="1928" actId="478"/>
-          <ac:picMkLst>
-            <pc:docMk/>
-            <pc:sldMk cId="446352604" sldId="267"/>
-            <ac:picMk id="128" creationId="{08B579CD-B1FD-45B1-AEC8-2203B9A4F300}"/>
-          </ac:picMkLst>
-        </pc:picChg>
-        <pc:picChg chg="add del mod">
-          <ac:chgData name="馬場　碧生" userId="242fe924-956f-4f80-97d5-7a3231fdf9ba" providerId="ADAL" clId="{E59E2DC9-86A0-43C6-AC92-2955BB4E7CDD}" dt="2026-02-06T02:40:31.120" v="1927" actId="478"/>
-          <ac:picMkLst>
-            <pc:docMk/>
-            <pc:sldMk cId="446352604" sldId="267"/>
-            <ac:picMk id="129" creationId="{204B73C6-92D4-4D15-BD3B-8CCA9DA11C6C}"/>
-          </ac:picMkLst>
-        </pc:picChg>
-        <pc:picChg chg="add del mod">
-          <ac:chgData name="馬場　碧生" userId="242fe924-956f-4f80-97d5-7a3231fdf9ba" providerId="ADAL" clId="{E59E2DC9-86A0-43C6-AC92-2955BB4E7CDD}" dt="2026-02-06T02:40:30.639" v="1926" actId="478"/>
-          <ac:picMkLst>
-            <pc:docMk/>
-            <pc:sldMk cId="446352604" sldId="267"/>
-            <ac:picMk id="130" creationId="{AC2C585A-E498-49D2-9B6E-586C7D0B9E73}"/>
-          </ac:picMkLst>
-        </pc:picChg>
-        <pc:picChg chg="add del mod">
-          <ac:chgData name="馬場　碧生" userId="242fe924-956f-4f80-97d5-7a3231fdf9ba" providerId="ADAL" clId="{E59E2DC9-86A0-43C6-AC92-2955BB4E7CDD}" dt="2026-02-09T00:41:24.240" v="2276" actId="478"/>
-          <ac:picMkLst>
-            <pc:docMk/>
-            <pc:sldMk cId="446352604" sldId="267"/>
-            <ac:picMk id="131" creationId="{668EC004-3283-43CE-87AD-E30293D4582D}"/>
-          </ac:picMkLst>
-        </pc:picChg>
-        <pc:picChg chg="add del mod">
-          <ac:chgData name="馬場　碧生" userId="242fe924-956f-4f80-97d5-7a3231fdf9ba" providerId="ADAL" clId="{E59E2DC9-86A0-43C6-AC92-2955BB4E7CDD}" dt="2026-02-06T02:41:08.745" v="1943" actId="478"/>
-          <ac:picMkLst>
-            <pc:docMk/>
-            <pc:sldMk cId="446352604" sldId="267"/>
-            <ac:picMk id="132" creationId="{E233754D-9D58-4AFF-949C-D7D0D8995B1C}"/>
-          </ac:picMkLst>
-        </pc:picChg>
-        <pc:picChg chg="add del mod">
-          <ac:chgData name="馬場　碧生" userId="242fe924-956f-4f80-97d5-7a3231fdf9ba" providerId="ADAL" clId="{E59E2DC9-86A0-43C6-AC92-2955BB4E7CDD}" dt="2026-02-06T02:41:09.689" v="1944" actId="478"/>
-          <ac:picMkLst>
-            <pc:docMk/>
-            <pc:sldMk cId="446352604" sldId="267"/>
-            <ac:picMk id="133" creationId="{AB4CF947-755A-42B5-A343-0BD51D7F874B}"/>
-          </ac:picMkLst>
-        </pc:picChg>
-        <pc:picChg chg="add del mod">
-          <ac:chgData name="馬場　碧生" userId="242fe924-956f-4f80-97d5-7a3231fdf9ba" providerId="ADAL" clId="{E59E2DC9-86A0-43C6-AC92-2955BB4E7CDD}" dt="2026-02-06T02:41:10.494" v="1945" actId="478"/>
-          <ac:picMkLst>
-            <pc:docMk/>
-            <pc:sldMk cId="446352604" sldId="267"/>
-            <ac:picMk id="134" creationId="{4CC0BA24-5DA6-456D-A1B8-F0DEB896C2B7}"/>
-          </ac:picMkLst>
-        </pc:picChg>
-        <pc:picChg chg="add del mod">
-          <ac:chgData name="馬場　碧生" userId="242fe924-956f-4f80-97d5-7a3231fdf9ba" providerId="ADAL" clId="{E59E2DC9-86A0-43C6-AC92-2955BB4E7CDD}" dt="2026-02-06T02:41:11.220" v="1946" actId="478"/>
-          <ac:picMkLst>
-            <pc:docMk/>
-            <pc:sldMk cId="446352604" sldId="267"/>
-            <ac:picMk id="135" creationId="{D1222D63-6C83-4D65-B9E1-BAE445B33EE2}"/>
-          </ac:picMkLst>
-        </pc:picChg>
-        <pc:picChg chg="add del mod">
-          <ac:chgData name="馬場　碧生" userId="242fe924-956f-4f80-97d5-7a3231fdf9ba" providerId="ADAL" clId="{E59E2DC9-86A0-43C6-AC92-2955BB4E7CDD}" dt="2026-02-09T00:41:25.799" v="2278" actId="478"/>
-          <ac:picMkLst>
-            <pc:docMk/>
-            <pc:sldMk cId="446352604" sldId="267"/>
-            <ac:picMk id="136" creationId="{57A14D92-AD9B-4087-94D8-D24FDE6B1597}"/>
-          </ac:picMkLst>
-        </pc:picChg>
-        <pc:picChg chg="add del mod">
-          <ac:chgData name="馬場　碧生" userId="242fe924-956f-4f80-97d5-7a3231fdf9ba" providerId="ADAL" clId="{E59E2DC9-86A0-43C6-AC92-2955BB4E7CDD}" dt="2026-02-09T00:42:23.906" v="2299" actId="478"/>
-          <ac:picMkLst>
-            <pc:docMk/>
-            <pc:sldMk cId="446352604" sldId="267"/>
-            <ac:picMk id="137" creationId="{2D143DCC-8DF8-48C7-91FC-E27BDB101710}"/>
-          </ac:picMkLst>
-        </pc:picChg>
-        <pc:picChg chg="add del mod">
-          <ac:chgData name="馬場　碧生" userId="242fe924-956f-4f80-97d5-7a3231fdf9ba" providerId="ADAL" clId="{E59E2DC9-86A0-43C6-AC92-2955BB4E7CDD}" dt="2026-02-09T00:41:22.403" v="2274" actId="478"/>
-          <ac:picMkLst>
-            <pc:docMk/>
-            <pc:sldMk cId="446352604" sldId="267"/>
-            <ac:picMk id="138" creationId="{F89E8B7A-FD51-4AD6-84A9-1505B25288CB}"/>
-          </ac:picMkLst>
-        </pc:picChg>
-        <pc:picChg chg="add del mod">
-          <ac:chgData name="馬場　碧生" userId="242fe924-956f-4f80-97d5-7a3231fdf9ba" providerId="ADAL" clId="{E59E2DC9-86A0-43C6-AC92-2955BB4E7CDD}" dt="2026-02-09T00:41:24.961" v="2277" actId="478"/>
-          <ac:picMkLst>
-            <pc:docMk/>
-            <pc:sldMk cId="446352604" sldId="267"/>
-            <ac:picMk id="139" creationId="{4799B35B-6344-4C62-8E63-E33844E05060}"/>
-          </ac:picMkLst>
-        </pc:picChg>
-        <pc:picChg chg="add del mod">
-          <ac:chgData name="馬場　碧生" userId="242fe924-956f-4f80-97d5-7a3231fdf9ba" providerId="ADAL" clId="{E59E2DC9-86A0-43C6-AC92-2955BB4E7CDD}" dt="2026-02-09T00:41:23.296" v="2275" actId="478"/>
-          <ac:picMkLst>
-            <pc:docMk/>
-            <pc:sldMk cId="446352604" sldId="267"/>
-            <ac:picMk id="140" creationId="{6787883D-5150-4D00-837C-CB1C6ADA3353}"/>
-          </ac:picMkLst>
-        </pc:picChg>
-        <pc:picChg chg="add del mod">
-          <ac:chgData name="馬場　碧生" userId="242fe924-956f-4f80-97d5-7a3231fdf9ba" providerId="ADAL" clId="{E59E2DC9-86A0-43C6-AC92-2955BB4E7CDD}" dt="2026-02-09T00:41:26.447" v="2279" actId="478"/>
-          <ac:picMkLst>
-            <pc:docMk/>
-            <pc:sldMk cId="446352604" sldId="267"/>
-            <ac:picMk id="141" creationId="{761CAE6B-B6B9-4035-B304-1AFA98B49535}"/>
-          </ac:picMkLst>
-        </pc:picChg>
-        <pc:picChg chg="add del mod">
-          <ac:chgData name="馬場　碧生" userId="242fe924-956f-4f80-97d5-7a3231fdf9ba" providerId="ADAL" clId="{E59E2DC9-86A0-43C6-AC92-2955BB4E7CDD}" dt="2026-02-09T00:41:13.579" v="2268" actId="478"/>
-          <ac:picMkLst>
-            <pc:docMk/>
-            <pc:sldMk cId="446352604" sldId="267"/>
-            <ac:picMk id="142" creationId="{6EFFC3F7-E1D7-4DB4-A801-F9DAC295195B}"/>
-          </ac:picMkLst>
-        </pc:picChg>
-        <pc:picChg chg="add del mod">
-          <ac:chgData name="馬場　碧生" userId="242fe924-956f-4f80-97d5-7a3231fdf9ba" providerId="ADAL" clId="{E59E2DC9-86A0-43C6-AC92-2955BB4E7CDD}" dt="2026-02-09T00:41:14.237" v="2269" actId="478"/>
-          <ac:picMkLst>
-            <pc:docMk/>
-            <pc:sldMk cId="446352604" sldId="267"/>
-            <ac:picMk id="143" creationId="{B77D6AAB-0013-4A9D-873E-0C733796EEAE}"/>
-          </ac:picMkLst>
-        </pc:picChg>
-        <pc:picChg chg="add del mod">
-          <ac:chgData name="馬場　碧生" userId="242fe924-956f-4f80-97d5-7a3231fdf9ba" providerId="ADAL" clId="{E59E2DC9-86A0-43C6-AC92-2955BB4E7CDD}" dt="2026-02-09T00:41:21.292" v="2273" actId="478"/>
-          <ac:picMkLst>
-            <pc:docMk/>
-            <pc:sldMk cId="446352604" sldId="267"/>
-            <ac:picMk id="144" creationId="{E29EAF6B-5303-4307-B66E-379D3CCDCA97}"/>
-          </ac:picMkLst>
-        </pc:picChg>
-        <pc:picChg chg="add del mod">
-          <ac:chgData name="馬場　碧生" userId="242fe924-956f-4f80-97d5-7a3231fdf9ba" providerId="ADAL" clId="{E59E2DC9-86A0-43C6-AC92-2955BB4E7CDD}" dt="2026-02-06T02:43:38.003" v="1996" actId="478"/>
-          <ac:picMkLst>
-            <pc:docMk/>
-            <pc:sldMk cId="446352604" sldId="267"/>
-            <ac:picMk id="147" creationId="{98A78015-549A-48E5-B448-BFEEFE732C66}"/>
-          </ac:picMkLst>
-        </pc:picChg>
-        <pc:picChg chg="add del mod">
-          <ac:chgData name="馬場　碧生" userId="242fe924-956f-4f80-97d5-7a3231fdf9ba" providerId="ADAL" clId="{E59E2DC9-86A0-43C6-AC92-2955BB4E7CDD}" dt="2026-02-06T02:43:38.003" v="1996" actId="478"/>
-          <ac:picMkLst>
-            <pc:docMk/>
-            <pc:sldMk cId="446352604" sldId="267"/>
-            <ac:picMk id="149" creationId="{64096ACF-6CBD-43C7-8A6A-A3C191C221FE}"/>
-          </ac:picMkLst>
-        </pc:picChg>
-        <pc:picChg chg="add mod">
-          <ac:chgData name="馬場　碧生" userId="242fe924-956f-4f80-97d5-7a3231fdf9ba" providerId="ADAL" clId="{E59E2DC9-86A0-43C6-AC92-2955BB4E7CDD}" dt="2026-02-09T00:45:58.472" v="2350" actId="14100"/>
-          <ac:picMkLst>
-            <pc:docMk/>
-            <pc:sldMk cId="446352604" sldId="267"/>
-            <ac:picMk id="151" creationId="{3A8D9314-278E-48A1-ACAC-4895D0B84DC9}"/>
-          </ac:picMkLst>
-        </pc:picChg>
-        <pc:picChg chg="add mod">
-          <ac:chgData name="馬場　碧生" userId="242fe924-956f-4f80-97d5-7a3231fdf9ba" providerId="ADAL" clId="{E59E2DC9-86A0-43C6-AC92-2955BB4E7CDD}" dt="2026-02-06T03:30:17.134" v="2210" actId="1076"/>
-          <ac:picMkLst>
-            <pc:docMk/>
-            <pc:sldMk cId="446352604" sldId="267"/>
-            <ac:picMk id="153" creationId="{AD3ECFD8-184E-4A74-A7C2-F06C8864E531}"/>
-          </ac:picMkLst>
-        </pc:picChg>
-        <pc:picChg chg="add mod">
-          <ac:chgData name="馬場　碧生" userId="242fe924-956f-4f80-97d5-7a3231fdf9ba" providerId="ADAL" clId="{E59E2DC9-86A0-43C6-AC92-2955BB4E7CDD}" dt="2026-02-06T03:30:17.134" v="2210" actId="1076"/>
-          <ac:picMkLst>
-            <pc:docMk/>
-            <pc:sldMk cId="446352604" sldId="267"/>
-            <ac:picMk id="155" creationId="{7EFC092F-3F7B-4432-B3E9-9BBB0676C50D}"/>
-          </ac:picMkLst>
-        </pc:picChg>
-        <pc:picChg chg="add del mod">
-          <ac:chgData name="馬場　碧生" userId="242fe924-956f-4f80-97d5-7a3231fdf9ba" providerId="ADAL" clId="{E59E2DC9-86A0-43C6-AC92-2955BB4E7CDD}" dt="2026-02-06T03:14:37.773" v="2039" actId="478"/>
-          <ac:picMkLst>
-            <pc:docMk/>
-            <pc:sldMk cId="446352604" sldId="267"/>
-            <ac:picMk id="157" creationId="{DC374E94-5112-4F55-B49D-47AC914520DB}"/>
-          </ac:picMkLst>
-        </pc:picChg>
-        <pc:picChg chg="add del mod ord">
-          <ac:chgData name="馬場　碧生" userId="242fe924-956f-4f80-97d5-7a3231fdf9ba" providerId="ADAL" clId="{E59E2DC9-86A0-43C6-AC92-2955BB4E7CDD}" dt="2026-02-06T03:19:48.102" v="2111" actId="478"/>
-          <ac:picMkLst>
-            <pc:docMk/>
-            <pc:sldMk cId="446352604" sldId="267"/>
-            <ac:picMk id="159" creationId="{18CE06A6-F5C7-426A-BAA1-A2D6857F9D78}"/>
-          </ac:picMkLst>
-        </pc:picChg>
-        <pc:picChg chg="add mod">
-          <ac:chgData name="馬場　碧生" userId="242fe924-956f-4f80-97d5-7a3231fdf9ba" providerId="ADAL" clId="{E59E2DC9-86A0-43C6-AC92-2955BB4E7CDD}" dt="2026-02-06T03:32:09.211" v="2228" actId="1076"/>
-          <ac:picMkLst>
-            <pc:docMk/>
-            <pc:sldMk cId="446352604" sldId="267"/>
-            <ac:picMk id="162" creationId="{CE618827-DF16-4279-9FCA-54DAEEE7F949}"/>
-          </ac:picMkLst>
-        </pc:picChg>
-        <pc:picChg chg="add del mod">
-          <ac:chgData name="馬場　碧生" userId="242fe924-956f-4f80-97d5-7a3231fdf9ba" providerId="ADAL" clId="{E59E2DC9-86A0-43C6-AC92-2955BB4E7CDD}" dt="2026-02-06T03:23:35.162" v="2149" actId="478"/>
-          <ac:picMkLst>
-            <pc:docMk/>
-            <pc:sldMk cId="446352604" sldId="267"/>
-            <ac:picMk id="164" creationId="{D55DDFF2-74A9-47B4-8F49-0216049376FD}"/>
-          </ac:picMkLst>
-        </pc:picChg>
-        <pc:picChg chg="add del mod">
-          <ac:chgData name="馬場　碧生" userId="242fe924-956f-4f80-97d5-7a3231fdf9ba" providerId="ADAL" clId="{E59E2DC9-86A0-43C6-AC92-2955BB4E7CDD}" dt="2026-02-06T03:23:35.162" v="2149" actId="478"/>
-          <ac:picMkLst>
-            <pc:docMk/>
-            <pc:sldMk cId="446352604" sldId="267"/>
-            <ac:picMk id="165" creationId="{30FEFE46-D47D-41D9-96D8-4AE99EE068BF}"/>
-          </ac:picMkLst>
-        </pc:picChg>
-        <pc:picChg chg="add mod">
-          <ac:chgData name="馬場　碧生" userId="242fe924-956f-4f80-97d5-7a3231fdf9ba" providerId="ADAL" clId="{E59E2DC9-86A0-43C6-AC92-2955BB4E7CDD}" dt="2026-02-06T03:32:09.211" v="2228" actId="1076"/>
-          <ac:picMkLst>
-            <pc:docMk/>
-            <pc:sldMk cId="446352604" sldId="267"/>
-            <ac:picMk id="167" creationId="{A3D05193-BE0C-4709-A38B-4712509C8C22}"/>
-          </ac:picMkLst>
-        </pc:picChg>
-        <pc:picChg chg="add mod">
-          <ac:chgData name="馬場　碧生" userId="242fe924-956f-4f80-97d5-7a3231fdf9ba" providerId="ADAL" clId="{E59E2DC9-86A0-43C6-AC92-2955BB4E7CDD}" dt="2026-02-06T03:27:53.348" v="2179" actId="1076"/>
-          <ac:picMkLst>
-            <pc:docMk/>
-            <pc:sldMk cId="446352604" sldId="267"/>
-            <ac:picMk id="169" creationId="{39DAD0B3-B42E-4DD8-A4DD-BB546B18CDAE}"/>
-          </ac:picMkLst>
-        </pc:picChg>
-        <pc:picChg chg="add del mod">
-          <ac:chgData name="馬場　碧生" userId="242fe924-956f-4f80-97d5-7a3231fdf9ba" providerId="ADAL" clId="{E59E2DC9-86A0-43C6-AC92-2955BB4E7CDD}" dt="2026-02-06T03:25:31.707" v="2156" actId="478"/>
-          <ac:picMkLst>
-            <pc:docMk/>
-            <pc:sldMk cId="446352604" sldId="267"/>
-            <ac:picMk id="171" creationId="{04E569E3-0665-4B4A-AF48-7A0841A76FAA}"/>
-          </ac:picMkLst>
-        </pc:picChg>
-        <pc:picChg chg="add del mod">
-          <ac:chgData name="馬場　碧生" userId="242fe924-956f-4f80-97d5-7a3231fdf9ba" providerId="ADAL" clId="{E59E2DC9-86A0-43C6-AC92-2955BB4E7CDD}" dt="2026-02-06T03:25:31.707" v="2156" actId="478"/>
-          <ac:picMkLst>
-            <pc:docMk/>
-            <pc:sldMk cId="446352604" sldId="267"/>
-            <ac:picMk id="173" creationId="{85344067-CE95-4ABD-A3F9-87AF587E9E1A}"/>
-          </ac:picMkLst>
-        </pc:picChg>
-        <pc:picChg chg="add mod">
-          <ac:chgData name="馬場　碧生" userId="242fe924-956f-4f80-97d5-7a3231fdf9ba" providerId="ADAL" clId="{E59E2DC9-86A0-43C6-AC92-2955BB4E7CDD}" dt="2026-02-06T03:32:14.481" v="2229" actId="1076"/>
-          <ac:picMkLst>
-            <pc:docMk/>
-            <pc:sldMk cId="446352604" sldId="267"/>
-            <ac:picMk id="175" creationId="{11BDEB2F-1E0D-455C-A040-AD738D6A03C4}"/>
-          </ac:picMkLst>
-        </pc:picChg>
-        <pc:picChg chg="add mod">
-          <ac:chgData name="馬場　碧生" userId="242fe924-956f-4f80-97d5-7a3231fdf9ba" providerId="ADAL" clId="{E59E2DC9-86A0-43C6-AC92-2955BB4E7CDD}" dt="2026-02-06T03:32:09.211" v="2228" actId="1076"/>
-          <ac:picMkLst>
-            <pc:docMk/>
-            <pc:sldMk cId="446352604" sldId="267"/>
-            <ac:picMk id="177" creationId="{C74FEF1D-F5E2-4EF1-8BE5-FFCC398DE29F}"/>
-          </ac:picMkLst>
-        </pc:picChg>
-        <pc:picChg chg="add del mod">
-          <ac:chgData name="馬場　碧生" userId="242fe924-956f-4f80-97d5-7a3231fdf9ba" providerId="ADAL" clId="{E59E2DC9-86A0-43C6-AC92-2955BB4E7CDD}" dt="2026-02-06T03:28:34.631" v="2194" actId="478"/>
-          <ac:picMkLst>
-            <pc:docMk/>
-            <pc:sldMk cId="446352604" sldId="267"/>
-            <ac:picMk id="178" creationId="{C94DA889-3E67-4910-AAC2-03566651C83B}"/>
-          </ac:picMkLst>
-        </pc:picChg>
-        <pc:cxnChg chg="add del mod ord">
-          <ac:chgData name="馬場　碧生" userId="242fe924-956f-4f80-97d5-7a3231fdf9ba" providerId="ADAL" clId="{E59E2DC9-86A0-43C6-AC92-2955BB4E7CDD}" dt="2026-02-06T02:40:21.788" v="1915" actId="478"/>
-          <ac:cxnSpMkLst>
-            <pc:docMk/>
-            <pc:sldMk cId="446352604" sldId="267"/>
-            <ac:cxnSpMk id="8" creationId="{C22FC29C-8FF7-4703-B842-1D3620E9749A}"/>
-          </ac:cxnSpMkLst>
-        </pc:cxnChg>
-        <pc:cxnChg chg="add del mod ord">
-          <ac:chgData name="馬場　碧生" userId="242fe924-956f-4f80-97d5-7a3231fdf9ba" providerId="ADAL" clId="{E59E2DC9-86A0-43C6-AC92-2955BB4E7CDD}" dt="2026-02-06T02:40:19.907" v="1912" actId="478"/>
-          <ac:cxnSpMkLst>
-            <pc:docMk/>
-            <pc:sldMk cId="446352604" sldId="267"/>
-            <ac:cxnSpMk id="9" creationId="{9793D342-82C4-4EB7-8195-6229D5614E9F}"/>
-          </ac:cxnSpMkLst>
-        </pc:cxnChg>
-        <pc:cxnChg chg="add del mod ord">
-          <ac:chgData name="馬場　碧生" userId="242fe924-956f-4f80-97d5-7a3231fdf9ba" providerId="ADAL" clId="{E59E2DC9-86A0-43C6-AC92-2955BB4E7CDD}" dt="2026-02-06T01:24:12.303" v="1374" actId="478"/>
-          <ac:cxnSpMkLst>
-            <pc:docMk/>
-            <pc:sldMk cId="446352604" sldId="267"/>
-            <ac:cxnSpMk id="10" creationId="{1EAA7152-619D-4E75-8C57-DEE8DF8EE19B}"/>
-          </ac:cxnSpMkLst>
-        </pc:cxnChg>
-        <pc:cxnChg chg="add del mod ord">
-          <ac:chgData name="馬場　碧生" userId="242fe924-956f-4f80-97d5-7a3231fdf9ba" providerId="ADAL" clId="{E59E2DC9-86A0-43C6-AC92-2955BB4E7CDD}" dt="2026-02-06T02:40:20.520" v="1913" actId="478"/>
-          <ac:cxnSpMkLst>
-            <pc:docMk/>
-            <pc:sldMk cId="446352604" sldId="267"/>
-            <ac:cxnSpMk id="11" creationId="{401FAA08-560C-4D53-8377-01A113B7C172}"/>
-          </ac:cxnSpMkLst>
-        </pc:cxnChg>
-        <pc:cxnChg chg="add del mod ord">
-          <ac:chgData name="馬場　碧生" userId="242fe924-956f-4f80-97d5-7a3231fdf9ba" providerId="ADAL" clId="{E59E2DC9-86A0-43C6-AC92-2955BB4E7CDD}" dt="2026-02-06T02:40:22.256" v="1916" actId="478"/>
-          <ac:cxnSpMkLst>
-            <pc:docMk/>
-            <pc:sldMk cId="446352604" sldId="267"/>
-            <ac:cxnSpMk id="12" creationId="{B97D8C4C-F6D2-4C28-90B1-1C8A7A9D79F1}"/>
-          </ac:cxnSpMkLst>
-        </pc:cxnChg>
-        <pc:cxnChg chg="add del mod ord">
-          <ac:chgData name="馬場　碧生" userId="242fe924-956f-4f80-97d5-7a3231fdf9ba" providerId="ADAL" clId="{E59E2DC9-86A0-43C6-AC92-2955BB4E7CDD}" dt="2026-02-06T02:40:24.137" v="1919" actId="478"/>
-          <ac:cxnSpMkLst>
-            <pc:docMk/>
-            <pc:sldMk cId="446352604" sldId="267"/>
-            <ac:cxnSpMk id="13" creationId="{AE84633C-A9FB-4EA0-906A-088C1467C322}"/>
-          </ac:cxnSpMkLst>
-        </pc:cxnChg>
-        <pc:cxnChg chg="add del mod ord">
-          <ac:chgData name="馬場　碧生" userId="242fe924-956f-4f80-97d5-7a3231fdf9ba" providerId="ADAL" clId="{E59E2DC9-86A0-43C6-AC92-2955BB4E7CDD}" dt="2026-02-06T02:40:23.668" v="1918" actId="478"/>
-          <ac:cxnSpMkLst>
-            <pc:docMk/>
-            <pc:sldMk cId="446352604" sldId="267"/>
-            <ac:cxnSpMk id="14" creationId="{9E709110-A827-4EFA-8E18-BF18CB4CA192}"/>
-          </ac:cxnSpMkLst>
-        </pc:cxnChg>
-        <pc:cxnChg chg="add del mod ord">
-          <ac:chgData name="馬場　碧生" userId="242fe924-956f-4f80-97d5-7a3231fdf9ba" providerId="ADAL" clId="{E59E2DC9-86A0-43C6-AC92-2955BB4E7CDD}" dt="2026-02-06T02:40:24.609" v="1920" actId="478"/>
-          <ac:cxnSpMkLst>
-            <pc:docMk/>
-            <pc:sldMk cId="446352604" sldId="267"/>
-            <ac:cxnSpMk id="15" creationId="{B1168D58-3D40-4B9D-A8BF-3021CC12598D}"/>
-          </ac:cxnSpMkLst>
-        </pc:cxnChg>
-        <pc:cxnChg chg="add del mod ord">
-          <ac:chgData name="馬場　碧生" userId="242fe924-956f-4f80-97d5-7a3231fdf9ba" providerId="ADAL" clId="{E59E2DC9-86A0-43C6-AC92-2955BB4E7CDD}" dt="2026-02-06T02:40:23.045" v="1917" actId="478"/>
-          <ac:cxnSpMkLst>
-            <pc:docMk/>
-            <pc:sldMk cId="446352604" sldId="267"/>
-            <ac:cxnSpMk id="16" creationId="{9C7BB3D9-43A7-4920-B847-566C79B9B42A}"/>
-          </ac:cxnSpMkLst>
-        </pc:cxnChg>
-        <pc:cxnChg chg="add del mod ord">
-          <ac:chgData name="馬場　碧生" userId="242fe924-956f-4f80-97d5-7a3231fdf9ba" providerId="ADAL" clId="{E59E2DC9-86A0-43C6-AC92-2955BB4E7CDD}" dt="2026-02-06T02:40:25.074" v="1921" actId="478"/>
-          <ac:cxnSpMkLst>
-            <pc:docMk/>
-            <pc:sldMk cId="446352604" sldId="267"/>
-            <ac:cxnSpMk id="17" creationId="{BEC563BD-9A39-4D0C-8680-E12EE3228FAF}"/>
-          </ac:cxnSpMkLst>
-        </pc:cxnChg>
-        <pc:cxnChg chg="add del mod ord">
-          <ac:chgData name="馬場　碧生" userId="242fe924-956f-4f80-97d5-7a3231fdf9ba" providerId="ADAL" clId="{E59E2DC9-86A0-43C6-AC92-2955BB4E7CDD}" dt="2026-02-06T01:24:05.345" v="1372" actId="478"/>
-          <ac:cxnSpMkLst>
-            <pc:docMk/>
-            <pc:sldMk cId="446352604" sldId="267"/>
-            <ac:cxnSpMk id="18" creationId="{8D515025-6479-4DE3-8527-16F4461D9A47}"/>
-          </ac:cxnSpMkLst>
-        </pc:cxnChg>
-        <pc:cxnChg chg="add del mod ord">
-          <ac:chgData name="馬場　碧生" userId="242fe924-956f-4f80-97d5-7a3231fdf9ba" providerId="ADAL" clId="{E59E2DC9-86A0-43C6-AC92-2955BB4E7CDD}" dt="2026-02-06T02:40:20.966" v="1914" actId="478"/>
-          <ac:cxnSpMkLst>
-            <pc:docMk/>
-            <pc:sldMk cId="446352604" sldId="267"/>
-            <ac:cxnSpMk id="19" creationId="{9DF79AAE-97D0-4E3A-98BC-D62CFC1A3C88}"/>
-          </ac:cxnSpMkLst>
-        </pc:cxnChg>
-        <pc:cxnChg chg="add del mod ord">
-          <ac:chgData name="馬場　碧生" userId="242fe924-956f-4f80-97d5-7a3231fdf9ba" providerId="ADAL" clId="{E59E2DC9-86A0-43C6-AC92-2955BB4E7CDD}" dt="2026-02-06T02:40:25.703" v="1922" actId="478"/>
-          <ac:cxnSpMkLst>
-            <pc:docMk/>
-            <pc:sldMk cId="446352604" sldId="267"/>
-            <ac:cxnSpMk id="20" creationId="{CA45BA04-0F91-4EC5-A5CA-6E6B98D47432}"/>
-          </ac:cxnSpMkLst>
-        </pc:cxnChg>
-        <pc:cxnChg chg="add del mod">
-          <ac:chgData name="馬場　碧生" userId="242fe924-956f-4f80-97d5-7a3231fdf9ba" providerId="ADAL" clId="{E59E2DC9-86A0-43C6-AC92-2955BB4E7CDD}" dt="2026-02-06T02:39:18.471" v="1895" actId="478"/>
-          <ac:cxnSpMkLst>
-            <pc:docMk/>
-            <pc:sldMk cId="446352604" sldId="267"/>
-            <ac:cxnSpMk id="26" creationId="{6F8661CA-AA82-427B-A1EE-38B68FEDDC89}"/>
-          </ac:cxnSpMkLst>
-        </pc:cxnChg>
-        <pc:cxnChg chg="add del mod">
-          <ac:chgData name="馬場　碧生" userId="242fe924-956f-4f80-97d5-7a3231fdf9ba" providerId="ADAL" clId="{E59E2DC9-86A0-43C6-AC92-2955BB4E7CDD}" dt="2026-02-06T02:39:15.471" v="1891" actId="478"/>
-          <ac:cxnSpMkLst>
-            <pc:docMk/>
-            <pc:sldMk cId="446352604" sldId="267"/>
-            <ac:cxnSpMk id="27" creationId="{0B2D49AC-6C18-4B56-B291-D61864A6B967}"/>
-          </ac:cxnSpMkLst>
-        </pc:cxnChg>
-        <pc:cxnChg chg="add del mod">
-          <ac:chgData name="馬場　碧生" userId="242fe924-956f-4f80-97d5-7a3231fdf9ba" providerId="ADAL" clId="{E59E2DC9-86A0-43C6-AC92-2955BB4E7CDD}" dt="2026-02-06T02:39:17.695" v="1894" actId="478"/>
-          <ac:cxnSpMkLst>
-            <pc:docMk/>
-            <pc:sldMk cId="446352604" sldId="267"/>
-            <ac:cxnSpMk id="28" creationId="{4CFC0A47-A50B-44E8-99D3-0D2C14C41513}"/>
-          </ac:cxnSpMkLst>
-        </pc:cxnChg>
-        <pc:cxnChg chg="add del mod">
-          <ac:chgData name="馬場　碧生" userId="242fe924-956f-4f80-97d5-7a3231fdf9ba" providerId="ADAL" clId="{E59E2DC9-86A0-43C6-AC92-2955BB4E7CDD}" dt="2026-02-06T02:39:16.923" v="1893" actId="478"/>
-          <ac:cxnSpMkLst>
-            <pc:docMk/>
-            <pc:sldMk cId="446352604" sldId="267"/>
-            <ac:cxnSpMk id="29" creationId="{82C95322-FC8D-4452-A6A2-3D02993C2959}"/>
-          </ac:cxnSpMkLst>
-        </pc:cxnChg>
-        <pc:cxnChg chg="add del mod">
-          <ac:chgData name="馬場　碧生" userId="242fe924-956f-4f80-97d5-7a3231fdf9ba" providerId="ADAL" clId="{E59E2DC9-86A0-43C6-AC92-2955BB4E7CDD}" dt="2026-02-06T02:39:16.308" v="1892" actId="478"/>
-          <ac:cxnSpMkLst>
-            <pc:docMk/>
-            <pc:sldMk cId="446352604" sldId="267"/>
-            <ac:cxnSpMk id="30" creationId="{D5F37E55-A46D-49C6-94BE-F35FF9A0A6C1}"/>
-          </ac:cxnSpMkLst>
-        </pc:cxnChg>
-        <pc:cxnChg chg="add del mod">
-          <ac:chgData name="馬場　碧生" userId="242fe924-956f-4f80-97d5-7a3231fdf9ba" providerId="ADAL" clId="{E59E2DC9-86A0-43C6-AC92-2955BB4E7CDD}" dt="2026-02-06T01:41:13.190" v="1576" actId="478"/>
-          <ac:cxnSpMkLst>
-            <pc:docMk/>
-            <pc:sldMk cId="446352604" sldId="267"/>
-            <ac:cxnSpMk id="35" creationId="{B229A840-E575-4A96-A54D-E9C2C7CFDDB4}"/>
-          </ac:cxnSpMkLst>
-        </pc:cxnChg>
-        <pc:cxnChg chg="add del mod">
-          <ac:chgData name="馬場　碧生" userId="242fe924-956f-4f80-97d5-7a3231fdf9ba" providerId="ADAL" clId="{E59E2DC9-86A0-43C6-AC92-2955BB4E7CDD}" dt="2026-02-06T02:40:19.136" v="1911" actId="478"/>
-          <ac:cxnSpMkLst>
-            <pc:docMk/>
-            <pc:sldMk cId="446352604" sldId="267"/>
-            <ac:cxnSpMk id="52" creationId="{D6F1E087-E229-4028-B40E-3C115DD3B9C8}"/>
-          </ac:cxnSpMkLst>
-        </pc:cxnChg>
-        <pc:cxnChg chg="add mod">
-          <ac:chgData name="馬場　碧生" userId="242fe924-956f-4f80-97d5-7a3231fdf9ba" providerId="ADAL" clId="{E59E2DC9-86A0-43C6-AC92-2955BB4E7CDD}" dt="2026-02-06T03:31:39.072" v="2222" actId="1076"/>
-          <ac:cxnSpMkLst>
-            <pc:docMk/>
-            <pc:sldMk cId="446352604" sldId="267"/>
-            <ac:cxnSpMk id="80" creationId="{C6409541-6BD0-4B26-9AAF-1F7CF7CAA7B6}"/>
-          </ac:cxnSpMkLst>
-        </pc:cxnChg>
-        <pc:cxnChg chg="add mod">
-          <ac:chgData name="馬場　碧生" userId="242fe924-956f-4f80-97d5-7a3231fdf9ba" providerId="ADAL" clId="{E59E2DC9-86A0-43C6-AC92-2955BB4E7CDD}" dt="2026-02-06T03:31:39.072" v="2222" actId="1076"/>
-          <ac:cxnSpMkLst>
-            <pc:docMk/>
-            <pc:sldMk cId="446352604" sldId="267"/>
-            <ac:cxnSpMk id="84" creationId="{9DC0A0E8-D366-490A-A31E-E69F1D6C7497}"/>
-          </ac:cxnSpMkLst>
-        </pc:cxnChg>
-        <pc:cxnChg chg="add mod">
-          <ac:chgData name="馬場　碧生" userId="242fe924-956f-4f80-97d5-7a3231fdf9ba" providerId="ADAL" clId="{E59E2DC9-86A0-43C6-AC92-2955BB4E7CDD}" dt="2026-02-06T03:31:39.072" v="2222" actId="1076"/>
-          <ac:cxnSpMkLst>
-            <pc:docMk/>
-            <pc:sldMk cId="446352604" sldId="267"/>
-            <ac:cxnSpMk id="85" creationId="{45E9023E-CD0B-41FA-BE6E-6D4E1F94CEED}"/>
-          </ac:cxnSpMkLst>
-        </pc:cxnChg>
-      </pc:sldChg>
-      <pc:sldChg chg="new del">
-        <pc:chgData name="馬場　碧生" userId="242fe924-956f-4f80-97d5-7a3231fdf9ba" providerId="ADAL" clId="{E59E2DC9-86A0-43C6-AC92-2955BB4E7CDD}" dt="2026-02-06T01:04:09.084" v="992" actId="680"/>
-        <pc:sldMkLst>
-          <pc:docMk/>
-          <pc:sldMk cId="479237498" sldId="267"/>
-        </pc:sldMkLst>
-      </pc:sldChg>
-    </pc:docChg>
-  </pc:docChgLst>
-</pc:chgInfo>
-</file>
-
 <file path=ppt/slideLayouts/slideLayout1.xml><?xml version="1.0" encoding="utf-8"?>
 <p:sldLayout xmlns:a="http://schemas.openxmlformats.org/drawingml/2006/main" xmlns:r="http://schemas.openxmlformats.org/officeDocument/2006/relationships" xmlns:p="http://schemas.openxmlformats.org/presentationml/2006/main" type="title" preserve="1">
   <p:cSld name="タイトル スライド">
@@ -2069,7 +270,7 @@
           <a:p>
             <a:fld id="{35EA5904-4EC5-43B2-B45D-3BD161D6142A}" type="datetimeFigureOut">
               <a:rPr kumimoji="1" lang="ja-JP" altLang="en-US" smtClean="0"/>
-              <a:t>2026/2/9</a:t>
+              <a:t>2026/2/13</a:t>
             </a:fld>
             <a:endParaRPr kumimoji="1" lang="ja-JP" altLang="en-US"/>
           </a:p>
@@ -2299,7 +500,7 @@
           <a:p>
             <a:fld id="{35EA5904-4EC5-43B2-B45D-3BD161D6142A}" type="datetimeFigureOut">
               <a:rPr kumimoji="1" lang="ja-JP" altLang="en-US" smtClean="0"/>
-              <a:t>2026/2/9</a:t>
+              <a:t>2026/2/13</a:t>
             </a:fld>
             <a:endParaRPr kumimoji="1" lang="ja-JP" altLang="en-US"/>
           </a:p>
@@ -2539,7 +740,7 @@
           <a:p>
             <a:fld id="{35EA5904-4EC5-43B2-B45D-3BD161D6142A}" type="datetimeFigureOut">
               <a:rPr kumimoji="1" lang="ja-JP" altLang="en-US" smtClean="0"/>
-              <a:t>2026/2/9</a:t>
+              <a:t>2026/2/13</a:t>
             </a:fld>
             <a:endParaRPr kumimoji="1" lang="ja-JP" altLang="en-US"/>
           </a:p>
@@ -2769,7 +970,7 @@
           <a:p>
             <a:fld id="{35EA5904-4EC5-43B2-B45D-3BD161D6142A}" type="datetimeFigureOut">
               <a:rPr kumimoji="1" lang="ja-JP" altLang="en-US" smtClean="0"/>
-              <a:t>2026/2/9</a:t>
+              <a:t>2026/2/13</a:t>
             </a:fld>
             <a:endParaRPr kumimoji="1" lang="ja-JP" altLang="en-US"/>
           </a:p>
@@ -3044,7 +1245,7 @@
           <a:p>
             <a:fld id="{35EA5904-4EC5-43B2-B45D-3BD161D6142A}" type="datetimeFigureOut">
               <a:rPr kumimoji="1" lang="ja-JP" altLang="en-US" smtClean="0"/>
-              <a:t>2026/2/9</a:t>
+              <a:t>2026/2/13</a:t>
             </a:fld>
             <a:endParaRPr kumimoji="1" lang="ja-JP" altLang="en-US"/>
           </a:p>
@@ -3373,7 +1574,7 @@
           <a:p>
             <a:fld id="{35EA5904-4EC5-43B2-B45D-3BD161D6142A}" type="datetimeFigureOut">
               <a:rPr kumimoji="1" lang="ja-JP" altLang="en-US" smtClean="0"/>
-              <a:t>2026/2/9</a:t>
+              <a:t>2026/2/13</a:t>
             </a:fld>
             <a:endParaRPr kumimoji="1" lang="ja-JP" altLang="en-US"/>
           </a:p>
@@ -3849,7 +2050,7 @@
           <a:p>
             <a:fld id="{35EA5904-4EC5-43B2-B45D-3BD161D6142A}" type="datetimeFigureOut">
               <a:rPr kumimoji="1" lang="ja-JP" altLang="en-US" smtClean="0"/>
-              <a:t>2026/2/9</a:t>
+              <a:t>2026/2/13</a:t>
             </a:fld>
             <a:endParaRPr kumimoji="1" lang="ja-JP" altLang="en-US"/>
           </a:p>
@@ -3990,7 +2191,7 @@
           <a:p>
             <a:fld id="{35EA5904-4EC5-43B2-B45D-3BD161D6142A}" type="datetimeFigureOut">
               <a:rPr kumimoji="1" lang="ja-JP" altLang="en-US" smtClean="0"/>
-              <a:t>2026/2/9</a:t>
+              <a:t>2026/2/13</a:t>
             </a:fld>
             <a:endParaRPr kumimoji="1" lang="ja-JP" altLang="en-US"/>
           </a:p>
@@ -4103,7 +2304,7 @@
           <a:p>
             <a:fld id="{35EA5904-4EC5-43B2-B45D-3BD161D6142A}" type="datetimeFigureOut">
               <a:rPr kumimoji="1" lang="ja-JP" altLang="en-US" smtClean="0"/>
-              <a:t>2026/2/9</a:t>
+              <a:t>2026/2/13</a:t>
             </a:fld>
             <a:endParaRPr kumimoji="1" lang="ja-JP" altLang="en-US"/>
           </a:p>
@@ -4446,7 +2647,7 @@
           <a:p>
             <a:fld id="{35EA5904-4EC5-43B2-B45D-3BD161D6142A}" type="datetimeFigureOut">
               <a:rPr kumimoji="1" lang="ja-JP" altLang="en-US" smtClean="0"/>
-              <a:t>2026/2/9</a:t>
+              <a:t>2026/2/13</a:t>
             </a:fld>
             <a:endParaRPr kumimoji="1" lang="ja-JP" altLang="en-US"/>
           </a:p>
@@ -4734,7 +2935,7 @@
           <a:p>
             <a:fld id="{35EA5904-4EC5-43B2-B45D-3BD161D6142A}" type="datetimeFigureOut">
               <a:rPr kumimoji="1" lang="ja-JP" altLang="en-US" smtClean="0"/>
-              <a:t>2026/2/9</a:t>
+              <a:t>2026/2/13</a:t>
             </a:fld>
             <a:endParaRPr kumimoji="1" lang="ja-JP" altLang="en-US"/>
           </a:p>
@@ -5007,7 +3208,7 @@
           <a:p>
             <a:fld id="{35EA5904-4EC5-43B2-B45D-3BD161D6142A}" type="datetimeFigureOut">
               <a:rPr kumimoji="1" lang="ja-JP" altLang="en-US" smtClean="0"/>
-              <a:t>2026/2/9</a:t>
+              <a:t>2026/2/13</a:t>
             </a:fld>
             <a:endParaRPr kumimoji="1" lang="ja-JP" altLang="en-US"/>
           </a:p>
@@ -10173,14 +8374,14 @@
           <p:nvPr>
             <p:extLst>
               <p:ext uri="{D42A27DB-BD31-4B8C-83A1-F6EECF244321}">
-                <p14:modId xmlns:p14="http://schemas.microsoft.com/office/powerpoint/2010/main" val="194061356"/>
+                <p14:modId xmlns:p14="http://schemas.microsoft.com/office/powerpoint/2010/main" val="3619473718"/>
               </p:ext>
             </p:extLst>
           </p:nvPr>
         </p:nvGraphicFramePr>
         <p:xfrm>
-          <a:off x="254001" y="1048172"/>
-          <a:ext cx="7023099" cy="3933616"/>
+          <a:off x="271849" y="1048172"/>
+          <a:ext cx="7005251" cy="3293536"/>
         </p:xfrm>
         <a:graphic>
           <a:graphicData uri="http://schemas.openxmlformats.org/drawingml/2006/table">
@@ -10189,7 +8390,7 @@
                 <a:tableStyleId>{5C22544A-7EE6-4342-B048-85BDC9FD1C3A}</a:tableStyleId>
               </a:tblPr>
               <a:tblGrid>
-                <a:gridCol w="2341033">
+                <a:gridCol w="2323185">
                   <a:extLst>
                     <a:ext uri="{9D8B030D-6E8A-4147-A177-3AD203B41FA5}">
                       <a16:colId xmlns:a16="http://schemas.microsoft.com/office/drawing/2014/main" val="3552947163"/>
@@ -10261,10 +8462,9 @@
                     <a:lstStyle/>
                     <a:p>
                       <a:r>
-                        <a:rPr kumimoji="1" lang="en-US" altLang="ja-JP" dirty="0"/>
-                        <a:t>D</a:t>
-                      </a:r>
-                      <a:endParaRPr kumimoji="1" lang="ja-JP" altLang="en-US" dirty="0"/>
+                        <a:rPr kumimoji="1" lang="ja-JP" altLang="en-US" dirty="0"/>
+                        <a:t>→</a:t>
+                      </a:r>
                     </a:p>
                   </a:txBody>
                   <a:tcPr/>
@@ -10320,11 +8520,27 @@
                     <a:bodyPr/>
                     <a:lstStyle/>
                     <a:p>
-                      <a:r>
-                        <a:rPr kumimoji="1" lang="en-US" altLang="ja-JP" dirty="0"/>
-                        <a:t>A</a:t>
-                      </a:r>
-                      <a:endParaRPr kumimoji="1" lang="ja-JP" altLang="en-US" dirty="0"/>
+                      <a:pPr marL="0" marR="0" lvl="0" indent="0" algn="l" defTabSz="914400" rtl="0" eaLnBrk="1" fontAlgn="auto" latinLnBrk="0" hangingPunct="1">
+                        <a:lnSpc>
+                          <a:spcPct val="100000"/>
+                        </a:lnSpc>
+                        <a:spcBef>
+                          <a:spcPts val="0"/>
+                        </a:spcBef>
+                        <a:spcAft>
+                          <a:spcPts val="0"/>
+                        </a:spcAft>
+                        <a:buClrTx/>
+                        <a:buSzTx/>
+                        <a:buFontTx/>
+                        <a:buNone/>
+                        <a:tabLst/>
+                        <a:defRPr/>
+                      </a:pPr>
+                      <a:r>
+                        <a:rPr kumimoji="1" lang="ja-JP" altLang="en-US" dirty="0"/>
+                        <a:t>←</a:t>
+                      </a:r>
                     </a:p>
                   </a:txBody>
                   <a:tcPr/>
@@ -10381,8 +8597,74 @@
                     <a:lstStyle/>
                     <a:p>
                       <a:r>
+                        <a:rPr kumimoji="1" lang="ja-JP" altLang="en-US" dirty="0"/>
+                        <a:t>← </a:t>
+                      </a:r>
+                      <a:r>
                         <a:rPr kumimoji="1" lang="en-US" altLang="ja-JP" dirty="0"/>
-                        <a:t>Space</a:t>
+                        <a:t>, </a:t>
+                      </a:r>
+                      <a:r>
+                        <a:rPr kumimoji="1" lang="ja-JP" altLang="en-US" dirty="0"/>
+                        <a:t>→  </a:t>
+                      </a:r>
+                      <a:r>
+                        <a:rPr kumimoji="1" lang="en-US" altLang="ja-JP" dirty="0"/>
+                        <a:t>2</a:t>
+                      </a:r>
+                      <a:r>
+                        <a:rPr kumimoji="1" lang="ja-JP" altLang="en-US" dirty="0"/>
+                        <a:t>連打</a:t>
+                      </a:r>
+                    </a:p>
+                  </a:txBody>
+                  <a:tcPr/>
+                </a:tc>
+                <a:tc>
+                  <a:txBody>
+                    <a:bodyPr/>
+                    <a:lstStyle/>
+                    <a:p>
+                      <a:pPr marL="0" marR="0" lvl="0" indent="0" algn="l" defTabSz="914400" rtl="0" eaLnBrk="1" fontAlgn="auto" latinLnBrk="0" hangingPunct="1">
+                        <a:lnSpc>
+                          <a:spcPct val="100000"/>
+                        </a:lnSpc>
+                        <a:spcBef>
+                          <a:spcPts val="0"/>
+                        </a:spcBef>
+                        <a:spcAft>
+                          <a:spcPts val="0"/>
+                        </a:spcAft>
+                        <a:buClrTx/>
+                        <a:buSzTx/>
+                        <a:buFontTx/>
+                        <a:buNone/>
+                        <a:tabLst/>
+                        <a:defRPr/>
+                      </a:pPr>
+                      <a:r>
+                        <a:rPr kumimoji="1" lang="ja-JP" altLang="en-US" dirty="0"/>
+                        <a:t>十字キー</a:t>
+                      </a:r>
+                      <a:r>
+                        <a:rPr kumimoji="1" lang="en-US" altLang="ja-JP" dirty="0"/>
+                        <a:t>(</a:t>
+                      </a:r>
+                      <a:r>
+                        <a:rPr kumimoji="1" lang="ja-JP" altLang="en-US" dirty="0"/>
+                        <a:t>左</a:t>
+                      </a:r>
+                      <a:r>
+                        <a:rPr kumimoji="1" lang="en-US" altLang="ja-JP" dirty="0"/>
+                        <a:t>,</a:t>
+                      </a:r>
+                      <a:r>
+                        <a:rPr kumimoji="1" lang="ja-JP" altLang="en-US" dirty="0"/>
+                        <a:t>右</a:t>
+                      </a:r>
+                      <a:r>
+                        <a:rPr kumimoji="1" lang="en-US" altLang="ja-JP" dirty="0"/>
+                        <a:t>)</a:t>
                       </a:r>
                       <a:endParaRPr kumimoji="1" lang="ja-JP" altLang="en-US" dirty="0"/>
                     </a:p>
@@ -10395,8 +8677,41 @@
                     <a:lstStyle/>
                     <a:p>
                       <a:r>
+                        <a:rPr kumimoji="1" lang="ja-JP" altLang="en-US" dirty="0"/>
+                        <a:t>走る</a:t>
+                      </a:r>
+                    </a:p>
+                  </a:txBody>
+                  <a:tcPr/>
+                </a:tc>
+                <a:extLst>
+                  <a:ext uri="{0D108BD9-81ED-4DB2-BD59-A6C34878D82A}">
+                    <a16:rowId xmlns:a16="http://schemas.microsoft.com/office/drawing/2014/main" val="3936166385"/>
+                  </a:ext>
+                </a:extLst>
+              </a:tr>
+              <a:tr h="312244">
+                <a:tc>
+                  <a:txBody>
+                    <a:bodyPr/>
+                    <a:lstStyle/>
+                    <a:p>
+                      <a:r>
+                        <a:rPr kumimoji="1" lang="ja-JP" altLang="en-US" dirty="0"/>
+                        <a:t>↑</a:t>
+                      </a:r>
+                    </a:p>
+                  </a:txBody>
+                  <a:tcPr/>
+                </a:tc>
+                <a:tc>
+                  <a:txBody>
+                    <a:bodyPr/>
+                    <a:lstStyle/>
+                    <a:p>
+                      <a:r>
                         <a:rPr kumimoji="1" lang="en-US" altLang="ja-JP" dirty="0"/>
-                        <a:t>A</a:t>
+                        <a:t>B</a:t>
                       </a:r>
                       <a:endParaRPr kumimoji="1" lang="ja-JP" altLang="en-US" dirty="0"/>
                     </a:p>
@@ -10422,7 +8737,7 @@
                   </a:ext>
                 </a:extLst>
               </a:tr>
-              <a:tr h="312244">
+              <a:tr h="412328">
                 <a:tc>
                   <a:txBody>
                     <a:bodyPr/>
@@ -10430,23 +8745,7 @@
                     <a:p>
                       <a:r>
                         <a:rPr kumimoji="1" lang="en-US" altLang="ja-JP" dirty="0"/>
-                        <a:t>Shift + D</a:t>
-                      </a:r>
-                      <a:r>
-                        <a:rPr kumimoji="1" lang="ja-JP" altLang="en-US" dirty="0"/>
-                        <a:t> </a:t>
-                      </a:r>
-                      <a:r>
-                        <a:rPr kumimoji="1" lang="en-US" altLang="ja-JP" dirty="0"/>
-                        <a:t>or</a:t>
-                      </a:r>
-                      <a:r>
-                        <a:rPr kumimoji="1" lang="ja-JP" altLang="en-US" dirty="0"/>
-                        <a:t> </a:t>
-                      </a:r>
-                      <a:r>
-                        <a:rPr kumimoji="1" lang="en-US" altLang="ja-JP" dirty="0"/>
-                        <a:t>A</a:t>
+                        <a:t>X</a:t>
                       </a:r>
                       <a:endParaRPr kumimoji="1" lang="ja-JP" altLang="en-US" dirty="0"/>
                     </a:p>
@@ -10460,54 +8759,7 @@
                     <a:p>
                       <a:r>
                         <a:rPr kumimoji="1" lang="en-US" altLang="ja-JP" dirty="0"/>
-                        <a:t>X</a:t>
-                      </a:r>
-                      <a:endParaRPr kumimoji="1" lang="ja-JP" altLang="en-US" dirty="0"/>
-                    </a:p>
-                  </a:txBody>
-                  <a:tcPr/>
-                </a:tc>
-                <a:tc>
-                  <a:txBody>
-                    <a:bodyPr/>
-                    <a:lstStyle/>
-                    <a:p>
-                      <a:r>
-                        <a:rPr kumimoji="1" lang="ja-JP" altLang="en-US" dirty="0"/>
-                        <a:t>走る</a:t>
-                      </a:r>
-                    </a:p>
-                  </a:txBody>
-                  <a:tcPr/>
-                </a:tc>
-                <a:extLst>
-                  <a:ext uri="{0D108BD9-81ED-4DB2-BD59-A6C34878D82A}">
-                    <a16:rowId xmlns:a16="http://schemas.microsoft.com/office/drawing/2014/main" val="2126881970"/>
-                  </a:ext>
-                </a:extLst>
-              </a:tr>
-              <a:tr h="412328">
-                <a:tc>
-                  <a:txBody>
-                    <a:bodyPr/>
-                    <a:lstStyle/>
-                    <a:p>
-                      <a:r>
-                        <a:rPr kumimoji="1" lang="ja-JP" altLang="en-US" dirty="0"/>
-                        <a:t>右クリック</a:t>
-                      </a:r>
-                    </a:p>
-                  </a:txBody>
-                  <a:tcPr/>
-                </a:tc>
-                <a:tc>
-                  <a:txBody>
-                    <a:bodyPr/>
-                    <a:lstStyle/>
-                    <a:p>
-                      <a:r>
-                        <a:rPr kumimoji="1" lang="en-US" altLang="ja-JP" dirty="0"/>
-                        <a:t>RT</a:t>
+                        <a:t>Y</a:t>
                       </a:r>
                       <a:endParaRPr kumimoji="1" lang="ja-JP" altLang="en-US" dirty="0"/>
                     </a:p>
@@ -10540,9 +8792,10 @@
                     <a:lstStyle/>
                     <a:p>
                       <a:r>
-                        <a:rPr kumimoji="1" lang="ja-JP" altLang="en-US" dirty="0"/>
-                        <a:t>カーソル</a:t>
-                      </a:r>
+                        <a:rPr kumimoji="1" lang="en-US" altLang="ja-JP" dirty="0"/>
+                        <a:t>Z</a:t>
+                      </a:r>
+                      <a:endParaRPr kumimoji="1" lang="ja-JP" altLang="en-US" dirty="0"/>
                     </a:p>
                   </a:txBody>
                   <a:tcPr/>
@@ -10553,9 +8806,10 @@
                     <a:lstStyle/>
                     <a:p>
                       <a:r>
-                        <a:rPr kumimoji="1" lang="ja-JP" altLang="en-US" dirty="0"/>
-                        <a:t>右スティック</a:t>
-                      </a:r>
+                        <a:rPr kumimoji="1" lang="en-US" altLang="ja-JP" dirty="0"/>
+                        <a:t>X</a:t>
+                      </a:r>
+                      <a:endParaRPr kumimoji="1" lang="ja-JP" altLang="en-US" dirty="0"/>
                     </a:p>
                   </a:txBody>
                   <a:tcPr/>
@@ -10567,14 +8821,19 @@
                     <a:p>
                       <a:r>
                         <a:rPr kumimoji="1" lang="ja-JP" altLang="en-US" dirty="0"/>
-                        <a:t>属性の選択　</a:t>
-                      </a:r>
-                      <a:endParaRPr kumimoji="1" lang="en-US" altLang="ja-JP" dirty="0"/>
-                    </a:p>
-                    <a:p>
+                        <a:t>属性の選択</a:t>
+                      </a:r>
+                      <a:r>
+                        <a:rPr kumimoji="1" lang="en-US" altLang="ja-JP" dirty="0"/>
+                        <a:t>(</a:t>
+                      </a:r>
                       <a:r>
                         <a:rPr kumimoji="1" lang="ja-JP" altLang="en-US" dirty="0"/>
-                        <a:t>投げる方向の選択</a:t>
+                        <a:t>ダイレクトに切り替え</a:t>
+                      </a:r>
+                      <a:r>
+                        <a:rPr kumimoji="1" lang="en-US" altLang="ja-JP" dirty="0"/>
+                        <a:t>)</a:t>
                       </a:r>
                     </a:p>
                   </a:txBody>
@@ -10593,21 +8852,8 @@
                     <a:lstStyle/>
                     <a:p>
                       <a:r>
-                        <a:rPr kumimoji="1" lang="ja-JP" altLang="en-US" dirty="0"/>
-                        <a:t>左クリック</a:t>
-                      </a:r>
-                    </a:p>
-                  </a:txBody>
-                  <a:tcPr/>
-                </a:tc>
-                <a:tc>
-                  <a:txBody>
-                    <a:bodyPr/>
-                    <a:lstStyle/>
-                    <a:p>
-                      <a:r>
                         <a:rPr kumimoji="1" lang="en-US" altLang="ja-JP" dirty="0"/>
-                        <a:t>B</a:t>
+                        <a:t>C</a:t>
                       </a:r>
                       <a:endParaRPr kumimoji="1" lang="ja-JP" altLang="en-US" dirty="0"/>
                     </a:p>
@@ -10620,42 +8866,8 @@
                     <a:lstStyle/>
                     <a:p>
                       <a:r>
-                        <a:rPr kumimoji="1" lang="ja-JP" altLang="en-US" dirty="0"/>
-                        <a:t>決定</a:t>
-                      </a:r>
-                    </a:p>
-                  </a:txBody>
-                  <a:tcPr/>
-                </a:tc>
-                <a:extLst>
-                  <a:ext uri="{0D108BD9-81ED-4DB2-BD59-A6C34878D82A}">
-                    <a16:rowId xmlns:a16="http://schemas.microsoft.com/office/drawing/2014/main" val="805145649"/>
-                  </a:ext>
-                </a:extLst>
-              </a:tr>
-              <a:tr h="412328">
-                <a:tc>
-                  <a:txBody>
-                    <a:bodyPr/>
-                    <a:lstStyle/>
-                    <a:p>
-                      <a:r>
                         <a:rPr kumimoji="1" lang="en-US" altLang="ja-JP" dirty="0"/>
-                        <a:t>Z</a:t>
-                      </a:r>
-                      <a:endParaRPr kumimoji="1" lang="ja-JP" altLang="en-US" dirty="0"/>
-                    </a:p>
-                  </a:txBody>
-                  <a:tcPr/>
-                </a:tc>
-                <a:tc>
-                  <a:txBody>
-                    <a:bodyPr/>
-                    <a:lstStyle/>
-                    <a:p>
-                      <a:r>
-                        <a:rPr kumimoji="1" lang="en-US" altLang="ja-JP" dirty="0"/>
-                        <a:t>LT</a:t>
+                        <a:t>A</a:t>
                       </a:r>
                       <a:endParaRPr kumimoji="1" lang="ja-JP" altLang="en-US" dirty="0"/>
                     </a:p>
@@ -10686,8 +8898,29 @@
                       </a:pPr>
                       <a:r>
                         <a:rPr kumimoji="1" lang="ja-JP" altLang="en-US" dirty="0"/>
-                        <a:t>カーソルを基準に投げる</a:t>
-                      </a:r>
+                        <a:t>投げる</a:t>
+                      </a:r>
+                      <a:r>
+                        <a:rPr kumimoji="1" lang="en-US" altLang="ja-JP" dirty="0"/>
+                        <a:t>(</a:t>
+                      </a:r>
+                      <a:r>
+                        <a:rPr kumimoji="1" lang="ja-JP" altLang="en-US" dirty="0"/>
+                        <a:t>固定</a:t>
+                      </a:r>
+                      <a:r>
+                        <a:rPr kumimoji="1" lang="en-US" altLang="ja-JP" dirty="0"/>
+                        <a:t>45</a:t>
+                      </a:r>
+                      <a:r>
+                        <a:rPr kumimoji="1" lang="ja-JP" altLang="en-US" dirty="0"/>
+                        <a:t>度</a:t>
+                      </a:r>
+                      <a:r>
+                        <a:rPr kumimoji="1" lang="en-US" altLang="ja-JP" dirty="0"/>
+                        <a:t>)</a:t>
+                      </a:r>
+                      <a:endParaRPr kumimoji="1" lang="ja-JP" altLang="en-US" dirty="0"/>
                     </a:p>
                   </a:txBody>
                   <a:tcPr/>
@@ -14104,231 +12337,4 @@
     </a:ext>
   </a:extLst>
 </a:theme>
-</file>
-
-<file path=customXml/item1.xml><?xml version="1.0" encoding="utf-8"?>
-<ct:contentTypeSchema xmlns:ct="http://schemas.microsoft.com/office/2006/metadata/contentType" xmlns:ma="http://schemas.microsoft.com/office/2006/metadata/properties/metaAttributes" ct:_="" ma:_="" ma:contentTypeName="ドキュメント" ma:contentTypeID="0x0101005F0D9E193D28814892BA96752E68B42F" ma:contentTypeVersion="11" ma:contentTypeDescription="新しいドキュメントを作成します。" ma:contentTypeScope="" ma:versionID="7ef2c4f7c5cf37d6221d7b1dda883374">
-  <xsd:schema xmlns:xsd="http://www.w3.org/2001/XMLSchema" xmlns:xs="http://www.w3.org/2001/XMLSchema" xmlns:p="http://schemas.microsoft.com/office/2006/metadata/properties" xmlns:ns2="c0d4a769-b4b6-44f5-bafd-bfbeb89b0b0c" xmlns:ns3="26553de7-2a3a-444c-a024-df4cb947fd03" targetNamespace="http://schemas.microsoft.com/office/2006/metadata/properties" ma:root="true" ma:fieldsID="725cefcd41332f88909580cd13155635" ns2:_="" ns3:_="">
-    <xsd:import namespace="c0d4a769-b4b6-44f5-bafd-bfbeb89b0b0c"/>
-    <xsd:import namespace="26553de7-2a3a-444c-a024-df4cb947fd03"/>
-    <xsd:element name="properties">
-      <xsd:complexType>
-        <xsd:sequence>
-          <xsd:element name="documentManagement">
-            <xsd:complexType>
-              <xsd:all>
-                <xsd:element ref="ns2:MediaServiceMetadata" minOccurs="0"/>
-                <xsd:element ref="ns2:MediaServiceFastMetadata" minOccurs="0"/>
-                <xsd:element ref="ns2:MediaServiceSearchProperties" minOccurs="0"/>
-                <xsd:element ref="ns2:MediaServiceDateTaken" minOccurs="0"/>
-                <xsd:element ref="ns2:MediaServiceGenerationTime" minOccurs="0"/>
-                <xsd:element ref="ns2:MediaServiceEventHashCode" minOccurs="0"/>
-                <xsd:element ref="ns2:MediaLengthInSeconds" minOccurs="0"/>
-                <xsd:element ref="ns2:lcf76f155ced4ddcb4097134ff3c332f" minOccurs="0"/>
-                <xsd:element ref="ns3:TaxCatchAll" minOccurs="0"/>
-                <xsd:element ref="ns2:MediaServiceOCR" minOccurs="0"/>
-              </xsd:all>
-            </xsd:complexType>
-          </xsd:element>
-        </xsd:sequence>
-      </xsd:complexType>
-    </xsd:element>
-  </xsd:schema>
-  <xsd:schema xmlns:xsd="http://www.w3.org/2001/XMLSchema" xmlns:xs="http://www.w3.org/2001/XMLSchema" xmlns:dms="http://schemas.microsoft.com/office/2006/documentManagement/types" xmlns:pc="http://schemas.microsoft.com/office/infopath/2007/PartnerControls" targetNamespace="c0d4a769-b4b6-44f5-bafd-bfbeb89b0b0c" elementFormDefault="qualified">
-    <xsd:import namespace="http://schemas.microsoft.com/office/2006/documentManagement/types"/>
-    <xsd:import namespace="http://schemas.microsoft.com/office/infopath/2007/PartnerControls"/>
-    <xsd:element name="MediaServiceMetadata" ma:index="8" nillable="true" ma:displayName="MediaServiceMetadata" ma:hidden="true" ma:internalName="MediaServiceMetadata" ma:readOnly="true">
-      <xsd:simpleType>
-        <xsd:restriction base="dms:Note"/>
-      </xsd:simpleType>
-    </xsd:element>
-    <xsd:element name="MediaServiceFastMetadata" ma:index="9" nillable="true" ma:displayName="MediaServiceFastMetadata" ma:hidden="true" ma:internalName="MediaServiceFastMetadata" ma:readOnly="true">
-      <xsd:simpleType>
-        <xsd:restriction base="dms:Note"/>
-      </xsd:simpleType>
-    </xsd:element>
-    <xsd:element name="MediaServiceSearchProperties" ma:index="10" nillable="true" ma:displayName="MediaServiceSearchProperties" ma:hidden="true" ma:internalName="MediaServiceSearchProperties" ma:readOnly="true">
-      <xsd:simpleType>
-        <xsd:restriction base="dms:Note"/>
-      </xsd:simpleType>
-    </xsd:element>
-    <xsd:element name="MediaServiceDateTaken" ma:index="11" nillable="true" ma:displayName="MediaServiceDateTaken" ma:hidden="true" ma:indexed="true" ma:internalName="MediaServiceDateTaken" ma:readOnly="true">
-      <xsd:simpleType>
-        <xsd:restriction base="dms:Text"/>
-      </xsd:simpleType>
-    </xsd:element>
-    <xsd:element name="MediaServiceGenerationTime" ma:index="12" nillable="true" ma:displayName="MediaServiceGenerationTime" ma:hidden="true" ma:internalName="MediaServiceGenerationTime" ma:readOnly="true">
-      <xsd:simpleType>
-        <xsd:restriction base="dms:Text"/>
-      </xsd:simpleType>
-    </xsd:element>
-    <xsd:element name="MediaServiceEventHashCode" ma:index="13" nillable="true" ma:displayName="MediaServiceEventHashCode" ma:hidden="true" ma:internalName="MediaServiceEventHashCode" ma:readOnly="true">
-      <xsd:simpleType>
-        <xsd:restriction base="dms:Text"/>
-      </xsd:simpleType>
-    </xsd:element>
-    <xsd:element name="MediaLengthInSeconds" ma:index="14" nillable="true" ma:displayName="MediaLengthInSeconds" ma:hidden="true" ma:internalName="MediaLengthInSeconds" ma:readOnly="true">
-      <xsd:simpleType>
-        <xsd:restriction base="dms:Unknown"/>
-      </xsd:simpleType>
-    </xsd:element>
-    <xsd:element name="lcf76f155ced4ddcb4097134ff3c332f" ma:index="16" nillable="true" ma:taxonomy="true" ma:internalName="lcf76f155ced4ddcb4097134ff3c332f" ma:taxonomyFieldName="MediaServiceImageTags" ma:displayName="画像タグ" ma:readOnly="false" ma:fieldId="{5cf76f15-5ced-4ddc-b409-7134ff3c332f}" ma:taxonomyMulti="true" ma:sspId="c7b788f1-635f-435b-a825-11a9aec0b64e" ma:termSetId="09814cd3-568e-fe90-9814-8d621ff8fb84" ma:anchorId="fba54fb3-c3e1-fe81-a776-ca4b69148c4d" ma:open="true" ma:isKeyword="false">
-      <xsd:complexType>
-        <xsd:sequence>
-          <xsd:element ref="pc:Terms" minOccurs="0" maxOccurs="1"/>
-        </xsd:sequence>
-      </xsd:complexType>
-    </xsd:element>
-    <xsd:element name="MediaServiceOCR" ma:index="18" nillable="true" ma:displayName="Extracted Text" ma:internalName="MediaServiceOCR" ma:readOnly="true">
-      <xsd:simpleType>
-        <xsd:restriction base="dms:Note">
-          <xsd:maxLength value="255"/>
-        </xsd:restriction>
-      </xsd:simpleType>
-    </xsd:element>
-  </xsd:schema>
-  <xsd:schema xmlns:xsd="http://www.w3.org/2001/XMLSchema" xmlns:xs="http://www.w3.org/2001/XMLSchema" xmlns:dms="http://schemas.microsoft.com/office/2006/documentManagement/types" xmlns:pc="http://schemas.microsoft.com/office/infopath/2007/PartnerControls" targetNamespace="26553de7-2a3a-444c-a024-df4cb947fd03" elementFormDefault="qualified">
-    <xsd:import namespace="http://schemas.microsoft.com/office/2006/documentManagement/types"/>
-    <xsd:import namespace="http://schemas.microsoft.com/office/infopath/2007/PartnerControls"/>
-    <xsd:element name="TaxCatchAll" ma:index="17" nillable="true" ma:displayName="Taxonomy Catch All Column" ma:hidden="true" ma:list="{0001ad64-140f-4029-930f-4ba1abb62398}" ma:internalName="TaxCatchAll" ma:showField="CatchAllData" ma:web="26553de7-2a3a-444c-a024-df4cb947fd03">
-      <xsd:complexType>
-        <xsd:complexContent>
-          <xsd:extension base="dms:MultiChoiceLookup">
-            <xsd:sequence>
-              <xsd:element name="Value" type="dms:Lookup" maxOccurs="unbounded" minOccurs="0" nillable="true"/>
-            </xsd:sequence>
-          </xsd:extension>
-        </xsd:complexContent>
-      </xsd:complexType>
-    </xsd:element>
-  </xsd:schema>
-  <xsd:schema xmlns="http://schemas.openxmlformats.org/package/2006/metadata/core-properties" xmlns:xsd="http://www.w3.org/2001/XMLSchema" xmlns:xsi="http://www.w3.org/2001/XMLSchema-instance" xmlns:dc="http://purl.org/dc/elements/1.1/" xmlns:dcterms="http://purl.org/dc/terms/" xmlns:odoc="http://schemas.microsoft.com/internal/obd" targetNamespace="http://schemas.openxmlformats.org/package/2006/metadata/core-properties" elementFormDefault="qualified" attributeFormDefault="unqualified" blockDefault="#all">
-    <xsd:import namespace="http://purl.org/dc/elements/1.1/" schemaLocation="http://dublincore.org/schemas/xmls/qdc/2003/04/02/dc.xsd"/>
-    <xsd:import namespace="http://purl.org/dc/terms/" schemaLocation="http://dublincore.org/schemas/xmls/qdc/2003/04/02/dcterms.xsd"/>
-    <xsd:element name="coreProperties" type="CT_coreProperties"/>
-    <xsd:complexType name="CT_coreProperties">
-      <xsd:all>
-        <xsd:element ref="dc:creator" minOccurs="0" maxOccurs="1"/>
-        <xsd:element ref="dcterms:created" minOccurs="0" maxOccurs="1"/>
-        <xsd:element ref="dc:identifier" minOccurs="0" maxOccurs="1"/>
-        <xsd:element name="contentType" minOccurs="0" maxOccurs="1" type="xsd:string" ma:index="0" ma:displayName="コンテンツ タイプ"/>
-        <xsd:element ref="dc:title" minOccurs="0" maxOccurs="1" ma:index="4" ma:displayName="タイトル"/>
-        <xsd:element ref="dc:subject" minOccurs="0" maxOccurs="1"/>
-        <xsd:element ref="dc:description" minOccurs="0" maxOccurs="1"/>
-        <xsd:element name="keywords" minOccurs="0" maxOccurs="1" type="xsd:string"/>
-        <xsd:element ref="dc:language" minOccurs="0" maxOccurs="1"/>
-        <xsd:element name="category" minOccurs="0" maxOccurs="1" type="xsd:string"/>
-        <xsd:element name="version" minOccurs="0" maxOccurs="1" type="xsd:string"/>
-        <xsd:element name="revision" minOccurs="0" maxOccurs="1" type="xsd:string">
-          <xsd:annotation>
-            <xsd:documentation>
-                        This value indicates the number of saves or revisions. The application is responsible for updating this value after each revision.
-                    </xsd:documentation>
-          </xsd:annotation>
-        </xsd:element>
-        <xsd:element name="lastModifiedBy" minOccurs="0" maxOccurs="1" type="xsd:string"/>
-        <xsd:element ref="dcterms:modified" minOccurs="0" maxOccurs="1"/>
-        <xsd:element name="contentStatus" minOccurs="0" maxOccurs="1" type="xsd:string"/>
-      </xsd:all>
-    </xsd:complexType>
-  </xsd:schema>
-  <xs:schema xmlns:pc="http://schemas.microsoft.com/office/infopath/2007/PartnerControls" xmlns:xs="http://www.w3.org/2001/XMLSchema" targetNamespace="http://schemas.microsoft.com/office/infopath/2007/PartnerControls" elementFormDefault="qualified" attributeFormDefault="unqualified">
-    <xs:element name="Person">
-      <xs:complexType>
-        <xs:sequence>
-          <xs:element ref="pc:DisplayName" minOccurs="0"/>
-          <xs:element ref="pc:AccountId" minOccurs="0"/>
-          <xs:element ref="pc:AccountType" minOccurs="0"/>
-        </xs:sequence>
-      </xs:complexType>
-    </xs:element>
-    <xs:element name="DisplayName" type="xs:string"/>
-    <xs:element name="AccountId" type="xs:string"/>
-    <xs:element name="AccountType" type="xs:string"/>
-    <xs:element name="BDCAssociatedEntity">
-      <xs:complexType>
-        <xs:sequence>
-          <xs:element ref="pc:BDCEntity" minOccurs="0" maxOccurs="unbounded"/>
-        </xs:sequence>
-        <xs:attribute ref="pc:EntityNamespace"/>
-        <xs:attribute ref="pc:EntityName"/>
-        <xs:attribute ref="pc:SystemInstanceName"/>
-        <xs:attribute ref="pc:AssociationName"/>
-      </xs:complexType>
-    </xs:element>
-    <xs:attribute name="EntityNamespace" type="xs:string"/>
-    <xs:attribute name="EntityName" type="xs:string"/>
-    <xs:attribute name="SystemInstanceName" type="xs:string"/>
-    <xs:attribute name="AssociationName" type="xs:string"/>
-    <xs:element name="BDCEntity">
-      <xs:complexType>
-        <xs:sequence>
-          <xs:element ref="pc:EntityDisplayName" minOccurs="0"/>
-          <xs:element ref="pc:EntityInstanceReference" minOccurs="0"/>
-          <xs:element ref="pc:EntityId1" minOccurs="0"/>
-          <xs:element ref="pc:EntityId2" minOccurs="0"/>
-          <xs:element ref="pc:EntityId3" minOccurs="0"/>
-          <xs:element ref="pc:EntityId4" minOccurs="0"/>
-          <xs:element ref="pc:EntityId5" minOccurs="0"/>
-        </xs:sequence>
-      </xs:complexType>
-    </xs:element>
-    <xs:element name="EntityDisplayName" type="xs:string"/>
-    <xs:element name="EntityInstanceReference" type="xs:string"/>
-    <xs:element name="EntityId1" type="xs:string"/>
-    <xs:element name="EntityId2" type="xs:string"/>
-    <xs:element name="EntityId3" type="xs:string"/>
-    <xs:element name="EntityId4" type="xs:string"/>
-    <xs:element name="EntityId5" type="xs:string"/>
-    <xs:element name="Terms">
-      <xs:complexType>
-        <xs:sequence>
-          <xs:element ref="pc:TermInfo" minOccurs="0" maxOccurs="unbounded"/>
-        </xs:sequence>
-      </xs:complexType>
-    </xs:element>
-    <xs:element name="TermInfo">
-      <xs:complexType>
-        <xs:sequence>
-          <xs:element ref="pc:TermName" minOccurs="0"/>
-          <xs:element ref="pc:TermId" minOccurs="0"/>
-        </xs:sequence>
-      </xs:complexType>
-    </xs:element>
-    <xs:element name="TermName" type="xs:string"/>
-    <xs:element name="TermId" type="xs:string"/>
-  </xs:schema>
-</ct:contentTypeSchema>
-</file>
-
-<file path=customXml/item2.xml><?xml version="1.0" encoding="utf-8"?>
-<?mso-contentType ?>
-<FormTemplates xmlns="http://schemas.microsoft.com/sharepoint/v3/contenttype/forms">
-  <Display>DocumentLibraryForm</Display>
-  <Edit>DocumentLibraryForm</Edit>
-  <New>DocumentLibraryForm</New>
-</FormTemplates>
-</file>
-
-<file path=customXml/item3.xml><?xml version="1.0" encoding="utf-8"?>
-<p:properties xmlns:p="http://schemas.microsoft.com/office/2006/metadata/properties" xmlns:xsi="http://www.w3.org/2001/XMLSchema-instance" xmlns:pc="http://schemas.microsoft.com/office/infopath/2007/PartnerControls">
-  <documentManagement>
-    <lcf76f155ced4ddcb4097134ff3c332f xmlns="c0d4a769-b4b6-44f5-bafd-bfbeb89b0b0c">
-      <Terms xmlns="http://schemas.microsoft.com/office/infopath/2007/PartnerControls"/>
-    </lcf76f155ced4ddcb4097134ff3c332f>
-    <TaxCatchAll xmlns="26553de7-2a3a-444c-a024-df4cb947fd03" xsi:nil="true"/>
-  </documentManagement>
-</p:properties>
-</file>
-
-<file path=customXml/itemProps1.xml><?xml version="1.0" encoding="utf-8"?>
-<ds:datastoreItem xmlns:ds="http://schemas.openxmlformats.org/officeDocument/2006/customXml" ds:itemID="{9733C0CF-56D9-4CF3-AE41-8832083F66A6}"/>
-</file>
-
-<file path=customXml/itemProps2.xml><?xml version="1.0" encoding="utf-8"?>
-<ds:datastoreItem xmlns:ds="http://schemas.openxmlformats.org/officeDocument/2006/customXml" ds:itemID="{83F53C6A-AF10-41B9-9A41-83F908B5E598}"/>
-</file>
-
-<file path=customXml/itemProps3.xml><?xml version="1.0" encoding="utf-8"?>
-<ds:datastoreItem xmlns:ds="http://schemas.openxmlformats.org/officeDocument/2006/customXml" ds:itemID="{C3754C93-8851-4568-B79C-6532DE58EEEF}"/>
 </file>